--- a/docs/slides/demo_deck.pptx
+++ b/docs/slides/demo_deck.pptx
@@ -21,9 +21,10 @@
     <p:sldId id="269" r:id="rId15"/>
     <p:sldId id="270" r:id="rId16"/>
     <p:sldId id="271" r:id="rId17"/>
+    <p:sldId id="272" r:id="rId18"/>
   </p:sldIdLst>
   <p:notesMasterIdLst>
-    <p:notesMasterId r:id="rId18"/>
+    <p:notesMasterId r:id="rId19"/>
   </p:notesMasterIdLst>
   <p:sldSz cx="12192000" cy="6858000"/>
   <p:notesSz cx="6858000" cy="12192000"/>
@@ -605,7 +606,7 @@
           <a:p>
             <a:r>
               <a:rPr lang="en-US" dirty="0"/>
-              <a:t>n = 5. Directionally clear, statistically weak — say so.</a:t>
+              <a:t>This is the headline finding. Keywords are not weak because the task is hard — they are weak because there is one input.</a:t>
             </a:r>
             <a:endParaRPr lang="en-US" dirty="0"/>
           </a:p>
@@ -693,7 +694,7 @@
           <a:p>
             <a:r>
               <a:rPr lang="en-US" dirty="0"/>
-              <a:t>The uncomfortable result, and the most useful one. The provenance machinery makes it visible but cannot fix it.</a:t>
+              <a:t>n = 5. Directionally clear, statistically weak — say so.</a:t>
             </a:r>
             <a:endParaRPr lang="en-US" dirty="0"/>
           </a:p>
@@ -781,7 +782,7 @@
           <a:p>
             <a:r>
               <a:rPr lang="en-US" dirty="0"/>
-              <a:t>Both 8B models ran int4 on the MIG slice, so this is not evidence that scale hurts — only that 2B sufficed here.</a:t>
+              <a:t>The uncomfortable result, and the most useful one. The provenance machinery makes it visible but cannot fix it.</a:t>
             </a:r>
             <a:endParaRPr lang="en-US" dirty="0"/>
           </a:p>
@@ -869,7 +870,7 @@
           <a:p>
             <a:r>
               <a:rPr lang="en-US" dirty="0"/>
-              <a:t>Frame this as confidence, not failure: pre-registering expectations is what makes the refutations meaningful.</a:t>
+              <a:t>Both 8B models ran int4 on the MIG slice, so this is not evidence that scale hurts — only that 2B sufficed here.</a:t>
             </a:r>
             <a:endParaRPr lang="en-US" dirty="0"/>
           </a:p>
@@ -957,7 +958,7 @@
           <a:p>
             <a:r>
               <a:rPr lang="en-US" dirty="0"/>
-              <a:t>Say these plainly. An examiner who finds a limitation you did not name trusts nothing else you said.</a:t>
+              <a:t>Frame this as confidence, not failure: pre-registering expectations is what makes the refutations meaningful.</a:t>
             </a:r>
             <a:endParaRPr lang="en-US" dirty="0"/>
           </a:p>
@@ -1045,7 +1046,7 @@
           <a:p>
             <a:r>
               <a:rPr lang="en-US" dirty="0"/>
-              <a:t>Lead with the human-annotation item — it is the one that unlocks everything else.</a:t>
+              <a:t>Say these plainly. An examiner who finds a limitation you did not name trusts nothing else you said.</a:t>
             </a:r>
             <a:endParaRPr lang="en-US" dirty="0"/>
           </a:p>
@@ -1133,7 +1134,7 @@
           <a:p>
             <a:r>
               <a:rPr lang="en-US" dirty="0"/>
-              <a:t>Close on this line, then thank the viewer. Do not add new information here.</a:t>
+              <a:t>Lead with the human-annotation item — it is the one that unlocks everything else.</a:t>
             </a:r>
             <a:endParaRPr lang="en-US" dirty="0"/>
           </a:p>
@@ -1157,6 +1158,94 @@
             <a:fld id="{F7021451-1387-4CA6-816F-3879F97B5CBC}" type="slidenum">
               <a:rPr lang="en-US"/>
               <a:t>16</a:t>
+            </a:fld>
+            <a:endParaRPr lang="en-US"/>
+          </a:p>
+        </p:txBody>
+      </p:sp>
+    </p:spTree>
+    <p:extLst>
+      <p:ext uri="{BB962C8B-B14F-4D97-AF65-F5344CB8AC3E}">
+        <p14:creationId xmlns:p14="http://schemas.microsoft.com/office/powerpoint/2010/main" val="1024086991"/>
+      </p:ext>
+    </p:extLst>
+  </p:cSld>
+  <p:clrMapOvr>
+    <a:masterClrMapping/>
+  </p:clrMapOvr>
+</p:notes>
+</file>
+
+<file path=ppt/notesSlides/notesSlide17.xml><?xml version="1.0" encoding="utf-8"?>
+<p:notes xmlns:a="http://schemas.openxmlformats.org/drawingml/2006/main" xmlns:r="http://schemas.openxmlformats.org/officeDocument/2006/relationships" xmlns:p="http://schemas.openxmlformats.org/presentationml/2006/main">
+  <p:cSld>
+    <p:spTree>
+      <p:nvGrpSpPr>
+        <p:cNvPr id="1" name=""/>
+        <p:cNvGrpSpPr/>
+        <p:nvPr/>
+      </p:nvGrpSpPr>
+      <p:grpSpPr>
+        <a:xfrm>
+          <a:off x="0" y="0"/>
+          <a:ext cx="0" cy="0"/>
+          <a:chOff x="0" y="0"/>
+          <a:chExt cx="0" cy="0"/>
+        </a:xfrm>
+      </p:grpSpPr>
+      <p:sp>
+        <p:nvSpPr>
+          <p:cNvPr id="2" name="Slide Image Placeholder 1"/>
+          <p:cNvSpPr>
+            <a:spLocks noGrp="1" noRot="1" noChangeAspect="1"/>
+          </p:cNvSpPr>
+          <p:nvPr>
+            <p:ph type="sldImg"/>
+          </p:nvPr>
+        </p:nvSpPr>
+        <p:spPr/>
+      </p:sp>
+      <p:sp>
+        <p:nvSpPr>
+          <p:cNvPr id="3" name="Notes Placeholder 2"/>
+          <p:cNvSpPr>
+            <a:spLocks noGrp="1"/>
+          </p:cNvSpPr>
+          <p:nvPr>
+            <p:ph type="body" idx="1"/>
+          </p:nvPr>
+        </p:nvSpPr>
+        <p:spPr/>
+        <p:txBody>
+          <a:bodyPr/>
+          <a:lstStyle/>
+          <a:p>
+            <a:r>
+              <a:rPr lang="en-US" dirty="0"/>
+              <a:t>Close on this line, then thank the viewer. Do not add new information here.</a:t>
+            </a:r>
+            <a:endParaRPr lang="en-US" dirty="0"/>
+          </a:p>
+        </p:txBody>
+      </p:sp>
+      <p:sp>
+        <p:nvSpPr>
+          <p:cNvPr id="4" name="Slide Number Placeholder 3"/>
+          <p:cNvSpPr>
+            <a:spLocks noGrp="1"/>
+          </p:cNvSpPr>
+          <p:nvPr>
+            <p:ph type="sldNum" sz="quarter" idx="10"/>
+          </p:nvPr>
+        </p:nvSpPr>
+        <p:spPr/>
+        <p:txBody>
+          <a:bodyPr/>
+          <a:lstStyle/>
+          <a:p>
+            <a:fld id="{F7021451-1387-4CA6-816F-3879F97B5CBC}" type="slidenum">
+              <a:rPr lang="en-US"/>
+              <a:t>17</a:t>
             </a:fld>
             <a:endParaRPr lang="en-US"/>
           </a:p>
@@ -1837,7 +1926,7 @@
           <a:p>
             <a:r>
               <a:rPr lang="en-US" dirty="0"/>
-              <a:t>This is the headline finding. Keywords are not weak because the task is hard — they are weak because there is one input.</a:t>
+              <a:t>This is the answer to "how is it evaluated". Show 02 resuming from its caches, then 03 rebuilding the tables with no GPU.</a:t>
             </a:r>
             <a:endParaRPr lang="en-US" dirty="0"/>
           </a:p>
@@ -2584,7 +2673,7 @@
                 <a:ea typeface="Calibri" pitchFamily="34" charset="-122"/>
                 <a:cs typeface="Calibri" pitchFamily="34" charset="-120"/>
               </a:rPr>
-              <a:t>RQ3 · 5 CLIPS</a:t>
+              <a:t>RQ2 · 626 CLIPS</a:t>
             </a:r>
             <a:endParaRPr lang="en-US" sz="1200" dirty="0"/>
           </a:p>
@@ -2623,7 +2712,7 @@
                 <a:ea typeface="Cambria" pitchFamily="34" charset="-122"/>
                 <a:cs typeface="Cambria" pitchFamily="34" charset="-120"/>
               </a:rPr>
-              <a:t>Robustness is field-specific, not system-wide</a:t>
+              <a:t>Agreement ranks independence, not difficulty</a:t>
             </a:r>
             <a:endParaRPr lang="en-US" sz="3200" dirty="0"/>
           </a:p>
@@ -2631,7 +2720,7 @@
       </p:sp>
       <p:pic>
         <p:nvPicPr>
-          <p:cNvPr id="4" name="Image 0" descr="docs/figures/fig3_robustness.png">    </p:cNvPr>
+          <p:cNvPr id="4" name="Image 0" descr="docs/figures/fig1_agreement_tiers.png">    </p:cNvPr>
           <p:cNvPicPr>
             <a:picLocks noChangeAspect="1"/>
           </p:cNvPicPr>
@@ -2692,7 +2781,7 @@
                 <a:ea typeface="Calibri" pitchFamily="34" charset="-122"/>
                 <a:cs typeface="Calibri" pitchFamily="34" charset="-120"/>
               </a:rPr>
-              <a:t>Under blur, visual tagging holds 0.96 of its output.</a:t>
+              <a:t>People count 0.812 — four unrelated families.</a:t>
             </a:r>
             <a:endParaRPr lang="en-US" sz="1400" dirty="0"/>
           </a:p>
@@ -2716,7 +2805,7 @@
                 <a:ea typeface="Calibri" pitchFamily="34" charset="-122"/>
                 <a:cs typeface="Calibri" pitchFamily="34" charset="-120"/>
               </a:rPr>
-              <a:t>On-screen text retains 0.07 — a thirteen-fold spread under one perturbation.</a:t>
+              <a:t>Keywords 0.173 — three extractors, one transcript.</a:t>
             </a:r>
             <a:endParaRPr lang="en-US" sz="1400" dirty="0"/>
           </a:p>
@@ -2740,7 +2829,7 @@
                 <a:ea typeface="Calibri" pitchFamily="34" charset="-122"/>
                 <a:cs typeface="Calibri" pitchFamily="34" charset="-120"/>
               </a:rPr>
-              <a:t>CLIP reads global scene semantics that survive low-pass filtering; character recognition does not.</a:t>
+              <a:t>On-screen text conflicts on 53.4% of clips and reaches high agreement on none.</a:t>
             </a:r>
             <a:endParaRPr lang="en-US" sz="1400" dirty="0"/>
           </a:p>
@@ -2764,7 +2853,7 @@
                 <a:ea typeface="Calibri" pitchFamily="34" charset="-122"/>
                 <a:cs typeface="Calibri" pitchFamily="34" charset="-120"/>
               </a:rPr>
-              <a:t>Deployment rule: on degraded material, treat the text field as absent, not as evidence of absence.</a:t>
+              <a:t>The ordering is the ordering of source independence.</a:t>
             </a:r>
             <a:endParaRPr lang="en-US" sz="1400" dirty="0"/>
           </a:p>
@@ -2835,7 +2924,7 @@
                 <a:ea typeface="Calibri" pitchFamily="34" charset="-122"/>
                 <a:cs typeface="Calibri" pitchFamily="34" charset="-120"/>
               </a:rPr>
-              <a:t>RQ4 · 626 CLIPS</a:t>
+              <a:t>RQ3 · 5 CLIPS</a:t>
             </a:r>
             <a:endParaRPr lang="en-US" sz="1200" dirty="0"/>
           </a:p>
@@ -2874,7 +2963,7 @@
                 <a:ea typeface="Cambria" pitchFamily="34" charset="-122"/>
                 <a:cs typeface="Cambria" pitchFamily="34" charset="-120"/>
               </a:rPr>
-              <a:t>A third annotator refuted my own hypothesis</a:t>
+              <a:t>Robustness is field-specific, not system-wide</a:t>
             </a:r>
             <a:endParaRPr lang="en-US" sz="3200" dirty="0"/>
           </a:p>
@@ -2882,7 +2971,7 @@
       </p:sp>
       <p:pic>
         <p:nvPicPr>
-          <p:cNvPr id="4" name="Image 0" descr="docs/figures/fig4_hosted_annotator.png">    </p:cNvPr>
+          <p:cNvPr id="4" name="Image 0" descr="docs/figures/fig3_robustness.png">    </p:cNvPr>
           <p:cNvPicPr>
             <a:picLocks noChangeAspect="1"/>
           </p:cNvPicPr>
@@ -2943,7 +3032,7 @@
                 <a:ea typeface="Calibri" pitchFamily="34" charset="-122"/>
                 <a:cs typeface="Calibri" pitchFamily="34" charset="-120"/>
               </a:rPr>
-              <a:t>The hosted annotator agrees with the local consensus only 0.419 of the time …</a:t>
+              <a:t>Under blur, visual tagging holds 0.96 of its output.</a:t>
             </a:r>
             <a:endParaRPr lang="en-US" sz="1400" dirty="0"/>
           </a:p>
@@ -2967,7 +3056,7 @@
                 <a:ea typeface="Calibri" pitchFamily="34" charset="-122"/>
                 <a:cs typeface="Calibri" pitchFamily="34" charset="-120"/>
               </a:rPr>
-              <a:t>… yet rewrites 49.0% of published visual-tag sets.</a:t>
+              <a:t>On-screen text retains 0.07 — a thirteen-fold spread under one perturbation.</a:t>
             </a:r>
             <a:endParaRPr lang="en-US" sz="1400" dirty="0"/>
           </a:p>
@@ -2991,7 +3080,7 @@
                 <a:ea typeface="Calibri" pitchFamily="34" charset="-122"/>
                 <a:cs typeface="Calibri" pitchFamily="34" charset="-120"/>
               </a:rPr>
-              <a:t>On on-screen text the dual-engine veto holds it to exactly zero changes.</a:t>
+              <a:t>CLIP reads global scene semantics that survive low-pass filtering; character recognition does not.</a:t>
             </a:r>
             <a:endParaRPr lang="en-US" sz="1400" dirty="0"/>
           </a:p>
@@ -3015,7 +3104,7 @@
                 <a:ea typeface="Calibri" pitchFamily="34" charset="-122"/>
                 <a:cs typeface="Calibri" pitchFamily="34" charset="-120"/>
               </a:rPr>
-              <a:t>Equal weighting is neutral only when families are independent — and two CLIP variants are not.</a:t>
+              <a:t>Deployment rule: on degraded material, treat the text field as absent, not as evidence of absence.</a:t>
             </a:r>
             <a:endParaRPr lang="en-US" sz="1400" dirty="0"/>
           </a:p>
@@ -3086,7 +3175,7 @@
                 <a:ea typeface="Calibri" pitchFamily="34" charset="-122"/>
                 <a:cs typeface="Calibri" pitchFamily="34" charset="-120"/>
               </a:rPr>
-              <a:t>RQ5 · 21,489 SCORES</a:t>
+              <a:t>RQ4 · 626 CLIPS</a:t>
             </a:r>
             <a:endParaRPr lang="en-US" sz="1200" dirty="0"/>
           </a:p>
@@ -3125,7 +3214,7 @@
                 <a:ea typeface="Cambria" pitchFamily="34" charset="-122"/>
                 <a:cs typeface="Cambria" pitchFamily="34" charset="-120"/>
               </a:rPr>
-              <a:t>Scale did not predict agreement</a:t>
+              <a:t>A third annotator refuted my own hypothesis</a:t>
             </a:r>
             <a:endParaRPr lang="en-US" sz="3200" dirty="0"/>
           </a:p>
@@ -3133,7 +3222,7 @@
       </p:sp>
       <p:pic>
         <p:nvPicPr>
-          <p:cNvPr id="4" name="Image 0" descr="docs/figures/fig2_vlm_benchmark.png">    </p:cNvPr>
+          <p:cNvPr id="4" name="Image 0" descr="docs/figures/fig4_hosted_annotator.png">    </p:cNvPr>
           <p:cNvPicPr>
             <a:picLocks noChangeAspect="1"/>
           </p:cNvPicPr>
@@ -3194,7 +3283,7 @@
                 <a:ea typeface="Calibri" pitchFamily="34" charset="-122"/>
                 <a:cs typeface="Calibri" pitchFamily="34" charset="-120"/>
               </a:rPr>
-              <a:t>Seven open-weight models, one protocol, 626 clips.</a:t>
+              <a:t>The hosted annotator agrees with the local consensus only 0.419 of the time …</a:t>
             </a:r>
             <a:endParaRPr lang="en-US" sz="1400" dirty="0"/>
           </a:p>
@@ -3218,7 +3307,7 @@
                 <a:ea typeface="Calibri" pitchFamily="34" charset="-122"/>
                 <a:cs typeface="Calibri" pitchFamily="34" charset="-120"/>
               </a:rPr>
-              <a:t>InternVL3-2B — the smallest — leads three of five fields.</a:t>
+              <a:t>… yet rewrites 49.0% of published visual-tag sets.</a:t>
             </a:r>
             <a:endParaRPr lang="en-US" sz="1400" dirty="0"/>
           </a:p>
@@ -3242,7 +3331,7 @@
                 <a:ea typeface="Calibri" pitchFamily="34" charset="-122"/>
                 <a:cs typeface="Calibri" pitchFamily="34" charset="-120"/>
               </a:rPr>
-              <a:t>It beats its own 8B sibling on all three.</a:t>
+              <a:t>On on-screen text the dual-engine veto holds it to exactly zero changes.</a:t>
             </a:r>
             <a:endParaRPr lang="en-US" sz="1400" dirty="0"/>
           </a:p>
@@ -3266,7 +3355,7 @@
                 <a:ea typeface="Calibri" pitchFamily="34" charset="-122"/>
                 <a:cs typeface="Calibri" pitchFamily="34" charset="-120"/>
               </a:rPr>
-              <a:t>Every model scores at or near zero on transcript: none of them accepts audio.</a:t>
+              <a:t>Equal weighting is neutral only when families are independent — and two CLIP variants are not.</a:t>
             </a:r>
             <a:endParaRPr lang="en-US" sz="1400" dirty="0"/>
           </a:p>
@@ -3337,7 +3426,7 @@
                 <a:ea typeface="Calibri" pitchFamily="34" charset="-122"/>
                 <a:cs typeface="Calibri" pitchFamily="34" charset="-120"/>
               </a:rPr>
-              <a:t>RESULTS</a:t>
+              <a:t>RQ5 · 21,489 SCORES</a:t>
             </a:r>
             <a:endParaRPr lang="en-US" sz="1200" dirty="0"/>
           </a:p>
@@ -3376,388 +3465,45 @@
                 <a:ea typeface="Cambria" pitchFamily="34" charset="-122"/>
                 <a:cs typeface="Cambria" pitchFamily="34" charset="-120"/>
               </a:rPr>
-              <a:t>The useful findings contradicted expectation</a:t>
+              <a:t>Scale did not predict agreement</a:t>
             </a:r>
             <a:endParaRPr lang="en-US" sz="3200" dirty="0"/>
           </a:p>
         </p:txBody>
       </p:sp>
-      <p:sp>
-        <p:nvSpPr>
-          <p:cNvPr id="4" name="Shape 2"/>
-          <p:cNvSpPr/>
-          <p:nvPr/>
-        </p:nvSpPr>
-        <p:spPr>
-          <a:xfrm>
-            <a:off x="685800" y="1874520"/>
-            <a:ext cx="3200400" cy="1371600"/>
-          </a:xfrm>
-          <a:prstGeom prst="roundRect">
-            <a:avLst>
-              <a:gd name="adj" fmla="val 6667"/>
-            </a:avLst>
-          </a:prstGeom>
-          <a:solidFill>
-            <a:srgbClr val="F4F6FA"/>
-          </a:solidFill>
-          <a:ln w="12700">
-            <a:solidFill>
-              <a:srgbClr val="F4F6FA"/>
-            </a:solidFill>
-            <a:prstDash val="solid"/>
-          </a:ln>
-        </p:spPr>
-      </p:sp>
-      <p:sp>
-        <p:nvSpPr>
-          <p:cNvPr id="5" name="Text 3"/>
-          <p:cNvSpPr txBox="1"/>
-          <p:nvPr/>
-        </p:nvSpPr>
-        <p:spPr>
-          <a:xfrm>
-            <a:off x="685800" y="2020824"/>
-            <a:ext cx="3200400" cy="658368"/>
-          </a:xfrm>
-          <a:prstGeom prst="rect">
-            <a:avLst/>
-          </a:prstGeom>
-          <a:noFill/>
-          <a:ln/>
-        </p:spPr>
-        <p:txBody>
-          <a:bodyPr wrap="square" rtlCol="0" anchor="ctr"/>
-          <a:lstStyle/>
-          <a:p>
-            <a:pPr algn="ctr" indent="0" marL="0">
-              <a:buNone/>
-            </a:pPr>
-            <a:r>
-              <a:rPr lang="en-US" sz="3400" b="1" dirty="0">
-                <a:solidFill>
-                  <a:srgbClr val="EB6834"/>
-                </a:solidFill>
-                <a:latin typeface="Cambria" pitchFamily="34" charset="0"/>
-                <a:ea typeface="Cambria" pitchFamily="34" charset="-122"/>
-                <a:cs typeface="Cambria" pitchFamily="34" charset="-120"/>
-              </a:rPr>
-              <a:t>8 of 11</a:t>
-            </a:r>
-            <a:endParaRPr lang="en-US" sz="3400" dirty="0"/>
-          </a:p>
-        </p:txBody>
-      </p:sp>
-      <p:sp>
-        <p:nvSpPr>
-          <p:cNvPr id="6" name="Text 4"/>
-          <p:cNvSpPr txBox="1"/>
-          <p:nvPr/>
-        </p:nvSpPr>
-        <p:spPr>
-          <a:xfrm>
-            <a:off x="795528" y="2679192"/>
-            <a:ext cx="2980944" cy="438912"/>
-          </a:xfrm>
-          <a:prstGeom prst="rect">
-            <a:avLst/>
-          </a:prstGeom>
-          <a:noFill/>
-          <a:ln/>
-        </p:spPr>
-        <p:txBody>
-          <a:bodyPr wrap="square" rtlCol="0" anchor="ctr"/>
-          <a:lstStyle/>
-          <a:p>
-            <a:pPr algn="ctr" indent="0" marL="0">
-              <a:buNone/>
-            </a:pPr>
-            <a:r>
-              <a:rPr lang="en-US" sz="1150" dirty="0">
-                <a:solidFill>
-                  <a:srgbClr val="5A5954"/>
-                </a:solidFill>
-                <a:latin typeface="Calibri" pitchFamily="34" charset="0"/>
-                <a:ea typeface="Calibri" pitchFamily="34" charset="-122"/>
-                <a:cs typeface="Calibri" pitchFamily="34" charset="-120"/>
-              </a:rPr>
-              <a:t>anticipated outcomes</a:t>
-            </a:r>
-            <a:endParaRPr lang="en-US" sz="1150" dirty="0"/>
-          </a:p>
-          <a:p>
-            <a:pPr algn="ctr" indent="0" marL="0">
-              <a:buNone/>
-            </a:pPr>
-            <a:r>
-              <a:rPr lang="en-US" sz="1150" dirty="0">
-                <a:solidFill>
-                  <a:srgbClr val="5A5954"/>
-                </a:solidFill>
-                <a:latin typeface="Calibri" pitchFamily="34" charset="0"/>
-                <a:ea typeface="Calibri" pitchFamily="34" charset="-122"/>
-                <a:cs typeface="Calibri" pitchFamily="34" charset="-120"/>
-              </a:rPr>
-              <a:t>refuted or partly refuted</a:t>
-            </a:r>
-            <a:endParaRPr lang="en-US" sz="1150" dirty="0"/>
-          </a:p>
-        </p:txBody>
-      </p:sp>
-      <p:sp>
-        <p:nvSpPr>
-          <p:cNvPr id="7" name="Shape 5"/>
-          <p:cNvSpPr/>
-          <p:nvPr/>
-        </p:nvSpPr>
-        <p:spPr>
-          <a:xfrm>
-            <a:off x="4480560" y="1874520"/>
-            <a:ext cx="3200400" cy="1371600"/>
-          </a:xfrm>
-          <a:prstGeom prst="roundRect">
-            <a:avLst>
-              <a:gd name="adj" fmla="val 6667"/>
-            </a:avLst>
-          </a:prstGeom>
-          <a:solidFill>
-            <a:srgbClr val="F4F6FA"/>
-          </a:solidFill>
-          <a:ln w="12700">
-            <a:solidFill>
-              <a:srgbClr val="F4F6FA"/>
-            </a:solidFill>
-            <a:prstDash val="solid"/>
-          </a:ln>
-        </p:spPr>
-      </p:sp>
-      <p:sp>
-        <p:nvSpPr>
-          <p:cNvPr id="8" name="Text 6"/>
-          <p:cNvSpPr txBox="1"/>
-          <p:nvPr/>
-        </p:nvSpPr>
-        <p:spPr>
-          <a:xfrm>
-            <a:off x="4480560" y="2020824"/>
-            <a:ext cx="3200400" cy="658368"/>
-          </a:xfrm>
-          <a:prstGeom prst="rect">
-            <a:avLst/>
-          </a:prstGeom>
-          <a:noFill/>
-          <a:ln/>
-        </p:spPr>
-        <p:txBody>
-          <a:bodyPr wrap="square" rtlCol="0" anchor="ctr"/>
-          <a:lstStyle/>
-          <a:p>
-            <a:pPr algn="ctr" indent="0" marL="0">
-              <a:buNone/>
-            </a:pPr>
-            <a:r>
-              <a:rPr lang="en-US" sz="3400" b="1" dirty="0">
-                <a:solidFill>
-                  <a:srgbClr val="12305B"/>
-                </a:solidFill>
-                <a:latin typeface="Cambria" pitchFamily="34" charset="0"/>
-                <a:ea typeface="Cambria" pitchFamily="34" charset="-122"/>
-                <a:cs typeface="Cambria" pitchFamily="34" charset="-120"/>
-              </a:rPr>
-              <a:t>3</a:t>
-            </a:r>
-            <a:endParaRPr lang="en-US" sz="3400" dirty="0"/>
-          </a:p>
-        </p:txBody>
-      </p:sp>
-      <p:sp>
-        <p:nvSpPr>
-          <p:cNvPr id="9" name="Text 7"/>
-          <p:cNvSpPr txBox="1"/>
-          <p:nvPr/>
-        </p:nvSpPr>
-        <p:spPr>
-          <a:xfrm>
-            <a:off x="4590288" y="2679192"/>
-            <a:ext cx="2980944" cy="438912"/>
-          </a:xfrm>
-          <a:prstGeom prst="rect">
-            <a:avLst/>
-          </a:prstGeom>
-          <a:noFill/>
-          <a:ln/>
-        </p:spPr>
-        <p:txBody>
-          <a:bodyPr wrap="square" rtlCol="0" anchor="ctr"/>
-          <a:lstStyle/>
-          <a:p>
-            <a:pPr algn="ctr" indent="0" marL="0">
-              <a:buNone/>
-            </a:pPr>
-            <a:r>
-              <a:rPr lang="en-US" sz="1150" dirty="0">
-                <a:solidFill>
-                  <a:srgbClr val="5A5954"/>
-                </a:solidFill>
-                <a:latin typeface="Calibri" pitchFamily="34" charset="0"/>
-                <a:ea typeface="Calibri" pitchFamily="34" charset="-122"/>
-                <a:cs typeface="Calibri" pitchFamily="34" charset="-120"/>
-              </a:rPr>
-              <a:t>confirmed — all following</a:t>
-            </a:r>
-            <a:endParaRPr lang="en-US" sz="1150" dirty="0"/>
-          </a:p>
-          <a:p>
-            <a:pPr algn="ctr" indent="0" marL="0">
-              <a:buNone/>
-            </a:pPr>
-            <a:r>
-              <a:rPr lang="en-US" sz="1150" dirty="0">
-                <a:solidFill>
-                  <a:srgbClr val="5A5954"/>
-                </a:solidFill>
-                <a:latin typeface="Calibri" pitchFamily="34" charset="0"/>
-                <a:ea typeface="Calibri" pitchFamily="34" charset="-122"/>
-                <a:cs typeface="Calibri" pitchFamily="34" charset="-120"/>
-              </a:rPr>
-              <a:t>deductively from the design</a:t>
-            </a:r>
-            <a:endParaRPr lang="en-US" sz="1150" dirty="0"/>
-          </a:p>
-        </p:txBody>
-      </p:sp>
-      <p:sp>
-        <p:nvSpPr>
-          <p:cNvPr id="10" name="Shape 8"/>
-          <p:cNvSpPr/>
-          <p:nvPr/>
-        </p:nvSpPr>
-        <p:spPr>
-          <a:xfrm>
-            <a:off x="8275320" y="1874520"/>
-            <a:ext cx="3200400" cy="1371600"/>
-          </a:xfrm>
-          <a:prstGeom prst="roundRect">
-            <a:avLst>
-              <a:gd name="adj" fmla="val 6667"/>
-            </a:avLst>
-          </a:prstGeom>
-          <a:solidFill>
-            <a:srgbClr val="F4F6FA"/>
-          </a:solidFill>
-          <a:ln w="12700">
-            <a:solidFill>
-              <a:srgbClr val="F4F6FA"/>
-            </a:solidFill>
-            <a:prstDash val="solid"/>
-          </a:ln>
-        </p:spPr>
-      </p:sp>
-      <p:sp>
-        <p:nvSpPr>
-          <p:cNvPr id="11" name="Text 9"/>
-          <p:cNvSpPr txBox="1"/>
-          <p:nvPr/>
-        </p:nvSpPr>
-        <p:spPr>
-          <a:xfrm>
-            <a:off x="8275320" y="2020824"/>
-            <a:ext cx="3200400" cy="658368"/>
-          </a:xfrm>
-          <a:prstGeom prst="rect">
-            <a:avLst/>
-          </a:prstGeom>
-          <a:noFill/>
-          <a:ln/>
-        </p:spPr>
-        <p:txBody>
-          <a:bodyPr wrap="square" rtlCol="0" anchor="ctr"/>
-          <a:lstStyle/>
-          <a:p>
-            <a:pPr algn="ctr" indent="0" marL="0">
-              <a:buNone/>
-            </a:pPr>
-            <a:r>
-              <a:rPr lang="en-US" sz="3400" b="1" dirty="0">
-                <a:solidFill>
-                  <a:srgbClr val="2A78D6"/>
-                </a:solidFill>
-                <a:latin typeface="Cambria" pitchFamily="34" charset="0"/>
-                <a:ea typeface="Cambria" pitchFamily="34" charset="-122"/>
-                <a:cs typeface="Cambria" pitchFamily="34" charset="-120"/>
-              </a:rPr>
-              <a:t>0</a:t>
-            </a:r>
-            <a:endParaRPr lang="en-US" sz="3400" dirty="0"/>
-          </a:p>
-        </p:txBody>
-      </p:sp>
-      <p:sp>
-        <p:nvSpPr>
-          <p:cNvPr id="12" name="Text 10"/>
-          <p:cNvSpPr txBox="1"/>
-          <p:nvPr/>
-        </p:nvSpPr>
-        <p:spPr>
-          <a:xfrm>
-            <a:off x="8385048" y="2679192"/>
-            <a:ext cx="2980944" cy="438912"/>
-          </a:xfrm>
-          <a:prstGeom prst="rect">
-            <a:avLst/>
-          </a:prstGeom>
-          <a:noFill/>
-          <a:ln/>
-        </p:spPr>
-        <p:txBody>
-          <a:bodyPr wrap="square" rtlCol="0" anchor="ctr"/>
-          <a:lstStyle/>
-          <a:p>
-            <a:pPr algn="ctr" indent="0" marL="0">
-              <a:buNone/>
-            </a:pPr>
-            <a:r>
-              <a:rPr lang="en-US" sz="1150" dirty="0">
-                <a:solidFill>
-                  <a:srgbClr val="5A5954"/>
-                </a:solidFill>
-                <a:latin typeface="Calibri" pitchFamily="34" charset="0"/>
-                <a:ea typeface="Calibri" pitchFamily="34" charset="-122"/>
-                <a:cs typeface="Calibri" pitchFamily="34" charset="-120"/>
-              </a:rPr>
-              <a:t>empirical expectations about</a:t>
-            </a:r>
-            <a:endParaRPr lang="en-US" sz="1150" dirty="0"/>
-          </a:p>
-          <a:p>
-            <a:pPr algn="ctr" indent="0" marL="0">
-              <a:buNone/>
-            </a:pPr>
-            <a:r>
-              <a:rPr lang="en-US" sz="1150" dirty="0">
-                <a:solidFill>
-                  <a:srgbClr val="5A5954"/>
-                </a:solidFill>
-                <a:latin typeface="Calibri" pitchFamily="34" charset="0"/>
-                <a:ea typeface="Calibri" pitchFamily="34" charset="-122"/>
-                <a:cs typeface="Calibri" pitchFamily="34" charset="-120"/>
-              </a:rPr>
-              <a:t>scale or deliberation upheld</a:t>
-            </a:r>
-            <a:endParaRPr lang="en-US" sz="1150" dirty="0"/>
-          </a:p>
-        </p:txBody>
-      </p:sp>
-      <p:sp>
-        <p:nvSpPr>
-          <p:cNvPr id="13" name="Text 11"/>
-          <p:cNvSpPr txBox="1"/>
-          <p:nvPr/>
-        </p:nvSpPr>
-        <p:spPr>
-          <a:xfrm>
-            <a:off x="685800" y="3611880"/>
-            <a:ext cx="10789920" cy="2377440"/>
+      <p:pic>
+        <p:nvPicPr>
+          <p:cNvPr id="4" name="Image 0" descr="docs/figures/fig2_vlm_benchmark.png">    </p:cNvPr>
+          <p:cNvPicPr>
+            <a:picLocks noChangeAspect="1"/>
+          </p:cNvPicPr>
+          <p:nvPr/>
+        </p:nvPicPr>
+        <p:blipFill>
+          <a:blip r:embed="rId1"/>
+          <a:srcRect l="0" r="0" t="0" b="0"/>
+          <a:stretch/>
+        </p:blipFill>
+        <p:spPr>
+          <a:xfrm>
+            <a:off x="685800" y="1783080"/>
+            <a:ext cx="6035040" cy="4023360"/>
+          </a:xfrm>
+          <a:prstGeom prst="rect">
+            <a:avLst/>
+          </a:prstGeom>
+        </p:spPr>
+      </p:pic>
+      <p:sp>
+        <p:nvSpPr>
+          <p:cNvPr id="5" name="Text 2"/>
+          <p:cNvSpPr txBox="1"/>
+          <p:nvPr/>
+        </p:nvSpPr>
+        <p:spPr>
+          <a:xfrm>
+            <a:off x="7086600" y="1965960"/>
+            <a:ext cx="4389120" cy="3657600"/>
           </a:xfrm>
           <a:prstGeom prst="rect">
             <a:avLst/>
@@ -3780,7 +3526,7 @@
               <a:buChar char="•"/>
             </a:pPr>
             <a:r>
-              <a:rPr lang="en-US" sz="1500" dirty="0">
+              <a:rPr lang="en-US" sz="1400" dirty="0">
                 <a:solidFill>
                   <a:srgbClr val="10100F"/>
                 </a:solidFill>
@@ -3788,9 +3534,9 @@
                 <a:ea typeface="Calibri" pitchFamily="34" charset="-122"/>
                 <a:cs typeface="Calibri" pitchFamily="34" charset="-120"/>
               </a:rPr>
-              <a:t>Agreement was expected to track task difficulty. It tracks source independence.</a:t>
-            </a:r>
-            <a:endParaRPr lang="en-US" sz="1500" dirty="0"/>
+              <a:t>Seven open-weight models, one protocol, 626 clips.</a:t>
+            </a:r>
+            <a:endParaRPr lang="en-US" sz="1400" dirty="0"/>
           </a:p>
           <a:p>
             <a:pPr marL="342900" indent="-342900">
@@ -3804,7 +3550,7 @@
               <a:buChar char="•"/>
             </a:pPr>
             <a:r>
-              <a:rPr lang="en-US" sz="1500" dirty="0">
+              <a:rPr lang="en-US" sz="1400" dirty="0">
                 <a:solidFill>
                   <a:srgbClr val="10100F"/>
                 </a:solidFill>
@@ -3812,9 +3558,9 @@
                 <a:ea typeface="Calibri" pitchFamily="34" charset="-122"/>
                 <a:cs typeface="Calibri" pitchFamily="34" charset="-120"/>
               </a:rPr>
-              <a:t>Three keyword extractors were expected to give three-way corroboration. They give one view, three times.</a:t>
-            </a:r>
-            <a:endParaRPr lang="en-US" sz="1500" dirty="0"/>
+              <a:t>InternVL3-2B — the smallest — leads three of five fields.</a:t>
+            </a:r>
+            <a:endParaRPr lang="en-US" sz="1400" dirty="0"/>
           </a:p>
           <a:p>
             <a:pPr marL="342900" indent="-342900">
@@ -3828,7 +3574,7 @@
               <a:buChar char="•"/>
             </a:pPr>
             <a:r>
-              <a:rPr lang="en-US" sz="1500" dirty="0">
+              <a:rPr lang="en-US" sz="1400" dirty="0">
                 <a:solidFill>
                   <a:srgbClr val="10100F"/>
                 </a:solidFill>
@@ -3836,9 +3582,9 @@
                 <a:ea typeface="Calibri" pitchFamily="34" charset="-122"/>
                 <a:cs typeface="Calibri" pitchFamily="34" charset="-120"/>
               </a:rPr>
-              <a:t>Degradation was expected to affect fields comparably. The spread is thirteen-fold.</a:t>
-            </a:r>
-            <a:endParaRPr lang="en-US" sz="1500" dirty="0"/>
+              <a:t>It beats its own 8B sibling on all three.</a:t>
+            </a:r>
+            <a:endParaRPr lang="en-US" sz="1400" dirty="0"/>
           </a:p>
           <a:p>
             <a:pPr marL="342900" indent="-342900">
@@ -3852,7 +3598,7 @@
               <a:buChar char="•"/>
             </a:pPr>
             <a:r>
-              <a:rPr lang="en-US" sz="1500" dirty="0">
+              <a:rPr lang="en-US" sz="1400" dirty="0">
                 <a:solidFill>
                   <a:srgbClr val="10100F"/>
                 </a:solidFill>
@@ -3860,9 +3606,9 @@
                 <a:ea typeface="Calibri" pitchFamily="34" charset="-122"/>
                 <a:cs typeface="Calibri" pitchFamily="34" charset="-120"/>
               </a:rPr>
-              <a:t>Larger models were expected to agree more. The smallest led.</a:t>
-            </a:r>
-            <a:endParaRPr lang="en-US" sz="1500" dirty="0"/>
+              <a:t>Every model scores at or near zero on transcript: none of them accepts audio.</a:t>
+            </a:r>
+            <a:endParaRPr lang="en-US" sz="1400" dirty="0"/>
           </a:p>
         </p:txBody>
       </p:sp>
@@ -3931,7 +3677,7 @@
                 <a:ea typeface="Calibri" pitchFamily="34" charset="-122"/>
                 <a:cs typeface="Calibri" pitchFamily="34" charset="-120"/>
               </a:rPr>
-              <a:t>LIMITATIONS</a:t>
+              <a:t>RESULTS</a:t>
             </a:r>
             <a:endParaRPr lang="en-US" sz="1200" dirty="0"/>
           </a:p>
@@ -3970,7 +3716,7 @@
                 <a:ea typeface="Cambria" pitchFamily="34" charset="-122"/>
                 <a:cs typeface="Cambria" pitchFamily="34" charset="-120"/>
               </a:rPr>
-              <a:t>What these numbers do not say</a:t>
+              <a:t>The useful findings contradicted expectation</a:t>
             </a:r>
             <a:endParaRPr lang="en-US" sz="3200" dirty="0"/>
           </a:p>
@@ -3984,12 +3730,12 @@
         </p:nvSpPr>
         <p:spPr>
           <a:xfrm>
-            <a:off x="685800" y="1828800"/>
-            <a:ext cx="10789920" cy="749808"/>
+            <a:off x="685800" y="1874520"/>
+            <a:ext cx="3200400" cy="1371600"/>
           </a:xfrm>
           <a:prstGeom prst="roundRect">
             <a:avLst>
-              <a:gd name="adj" fmla="val 9756"/>
+              <a:gd name="adj" fmla="val 6667"/>
             </a:avLst>
           </a:prstGeom>
           <a:solidFill>
@@ -4011,34 +3757,34 @@
         </p:nvSpPr>
         <p:spPr>
           <a:xfrm>
-            <a:off x="914400" y="1828800"/>
-            <a:ext cx="2834640" cy="749808"/>
-          </a:xfrm>
-          <a:prstGeom prst="rect">
-            <a:avLst/>
-          </a:prstGeom>
-          <a:noFill/>
-          <a:ln/>
-        </p:spPr>
-        <p:txBody>
-          <a:bodyPr wrap="square" lIns="0" tIns="0" rIns="0" bIns="0" rtlCol="0" anchor="ctr"/>
-          <a:lstStyle/>
-          <a:p>
-            <a:pPr indent="0" marL="0">
-              <a:buNone/>
-            </a:pPr>
-            <a:r>
-              <a:rPr lang="en-US" sz="1450" b="1" dirty="0">
+            <a:off x="685800" y="2020824"/>
+            <a:ext cx="3200400" cy="658368"/>
+          </a:xfrm>
+          <a:prstGeom prst="rect">
+            <a:avLst/>
+          </a:prstGeom>
+          <a:noFill/>
+          <a:ln/>
+        </p:spPr>
+        <p:txBody>
+          <a:bodyPr wrap="square" rtlCol="0" anchor="ctr"/>
+          <a:lstStyle/>
+          <a:p>
+            <a:pPr algn="ctr" indent="0" marL="0">
+              <a:buNone/>
+            </a:pPr>
+            <a:r>
+              <a:rPr lang="en-US" sz="3400" b="1" dirty="0">
                 <a:solidFill>
                   <a:srgbClr val="EB6834"/>
                 </a:solidFill>
-                <a:latin typeface="Calibri" pitchFamily="34" charset="0"/>
-                <a:ea typeface="Calibri" pitchFamily="34" charset="-122"/>
-                <a:cs typeface="Calibri" pitchFamily="34" charset="-120"/>
-              </a:rPr>
-              <a:t>No human reference</a:t>
-            </a:r>
-            <a:endParaRPr lang="en-US" sz="1450" dirty="0"/>
+                <a:latin typeface="Cambria" pitchFamily="34" charset="0"/>
+                <a:ea typeface="Cambria" pitchFamily="34" charset="-122"/>
+                <a:cs typeface="Cambria" pitchFamily="34" charset="-120"/>
+              </a:rPr>
+              <a:t>8 of 11</a:t>
+            </a:r>
+            <a:endParaRPr lang="en-US" sz="3400" dirty="0"/>
           </a:p>
         </p:txBody>
       </p:sp>
@@ -4050,34 +3796,51 @@
         </p:nvSpPr>
         <p:spPr>
           <a:xfrm>
-            <a:off x="3886200" y="1828800"/>
-            <a:ext cx="7315200" cy="749808"/>
-          </a:xfrm>
-          <a:prstGeom prst="rect">
-            <a:avLst/>
-          </a:prstGeom>
-          <a:noFill/>
-          <a:ln/>
-        </p:spPr>
-        <p:txBody>
-          <a:bodyPr wrap="square" lIns="0" tIns="0" rIns="0" bIns="0" rtlCol="0" anchor="ctr"/>
-          <a:lstStyle/>
-          <a:p>
-            <a:pPr indent="0" marL="0">
-              <a:buNone/>
-            </a:pPr>
-            <a:r>
-              <a:rPr lang="en-US" sz="1350" dirty="0">
-                <a:solidFill>
-                  <a:srgbClr val="10100F"/>
-                </a:solidFill>
-                <a:latin typeface="Calibri" pitchFamily="34" charset="0"/>
-                <a:ea typeface="Calibri" pitchFamily="34" charset="-122"/>
-                <a:cs typeface="Calibri" pitchFamily="34" charset="-120"/>
-              </a:rPr>
-              <a:t>Every figure measures corroboration between automatic sources — never accuracy.</a:t>
-            </a:r>
-            <a:endParaRPr lang="en-US" sz="1350" dirty="0"/>
+            <a:off x="795528" y="2679192"/>
+            <a:ext cx="2980944" cy="438912"/>
+          </a:xfrm>
+          <a:prstGeom prst="rect">
+            <a:avLst/>
+          </a:prstGeom>
+          <a:noFill/>
+          <a:ln/>
+        </p:spPr>
+        <p:txBody>
+          <a:bodyPr wrap="square" rtlCol="0" anchor="ctr"/>
+          <a:lstStyle/>
+          <a:p>
+            <a:pPr algn="ctr" indent="0" marL="0">
+              <a:buNone/>
+            </a:pPr>
+            <a:r>
+              <a:rPr lang="en-US" sz="1150" dirty="0">
+                <a:solidFill>
+                  <a:srgbClr val="5A5954"/>
+                </a:solidFill>
+                <a:latin typeface="Calibri" pitchFamily="34" charset="0"/>
+                <a:ea typeface="Calibri" pitchFamily="34" charset="-122"/>
+                <a:cs typeface="Calibri" pitchFamily="34" charset="-120"/>
+              </a:rPr>
+              <a:t>anticipated outcomes</a:t>
+            </a:r>
+            <a:endParaRPr lang="en-US" sz="1150" dirty="0"/>
+          </a:p>
+          <a:p>
+            <a:pPr algn="ctr" indent="0" marL="0">
+              <a:buNone/>
+            </a:pPr>
+            <a:r>
+              <a:rPr lang="en-US" sz="1150" dirty="0">
+                <a:solidFill>
+                  <a:srgbClr val="5A5954"/>
+                </a:solidFill>
+                <a:latin typeface="Calibri" pitchFamily="34" charset="0"/>
+                <a:ea typeface="Calibri" pitchFamily="34" charset="-122"/>
+                <a:cs typeface="Calibri" pitchFamily="34" charset="-120"/>
+              </a:rPr>
+              <a:t>refuted or partly refuted</a:t>
+            </a:r>
+            <a:endParaRPr lang="en-US" sz="1150" dirty="0"/>
           </a:p>
         </p:txBody>
       </p:sp>
@@ -4089,12 +3852,12 @@
         </p:nvSpPr>
         <p:spPr>
           <a:xfrm>
-            <a:off x="685800" y="2688336"/>
-            <a:ext cx="10789920" cy="749808"/>
+            <a:off x="4480560" y="1874520"/>
+            <a:ext cx="3200400" cy="1371600"/>
           </a:xfrm>
           <a:prstGeom prst="roundRect">
             <a:avLst>
-              <a:gd name="adj" fmla="val 9756"/>
+              <a:gd name="adj" fmla="val 6667"/>
             </a:avLst>
           </a:prstGeom>
           <a:solidFill>
@@ -4116,34 +3879,34 @@
         </p:nvSpPr>
         <p:spPr>
           <a:xfrm>
-            <a:off x="914400" y="2688336"/>
-            <a:ext cx="2834640" cy="749808"/>
-          </a:xfrm>
-          <a:prstGeom prst="rect">
-            <a:avLst/>
-          </a:prstGeom>
-          <a:noFill/>
-          <a:ln/>
-        </p:spPr>
-        <p:txBody>
-          <a:bodyPr wrap="square" lIns="0" tIns="0" rIns="0" bIns="0" rtlCol="0" anchor="ctr"/>
-          <a:lstStyle/>
-          <a:p>
-            <a:pPr indent="0" marL="0">
-              <a:buNone/>
-            </a:pPr>
-            <a:r>
-              <a:rPr lang="en-US" sz="1450" b="1" dirty="0">
-                <a:solidFill>
-                  <a:srgbClr val="EB6834"/>
-                </a:solidFill>
-                <a:latin typeface="Calibri" pitchFamily="34" charset="0"/>
-                <a:ea typeface="Calibri" pitchFamily="34" charset="-122"/>
-                <a:cs typeface="Calibri" pitchFamily="34" charset="-120"/>
-              </a:rPr>
-              <a:t>Correlated sources</a:t>
-            </a:r>
-            <a:endParaRPr lang="en-US" sz="1450" dirty="0"/>
+            <a:off x="4480560" y="2020824"/>
+            <a:ext cx="3200400" cy="658368"/>
+          </a:xfrm>
+          <a:prstGeom prst="rect">
+            <a:avLst/>
+          </a:prstGeom>
+          <a:noFill/>
+          <a:ln/>
+        </p:spPr>
+        <p:txBody>
+          <a:bodyPr wrap="square" rtlCol="0" anchor="ctr"/>
+          <a:lstStyle/>
+          <a:p>
+            <a:pPr algn="ctr" indent="0" marL="0">
+              <a:buNone/>
+            </a:pPr>
+            <a:r>
+              <a:rPr lang="en-US" sz="3400" b="1" dirty="0">
+                <a:solidFill>
+                  <a:srgbClr val="12305B"/>
+                </a:solidFill>
+                <a:latin typeface="Cambria" pitchFamily="34" charset="0"/>
+                <a:ea typeface="Cambria" pitchFamily="34" charset="-122"/>
+                <a:cs typeface="Cambria" pitchFamily="34" charset="-120"/>
+              </a:rPr>
+              <a:t>3</a:t>
+            </a:r>
+            <a:endParaRPr lang="en-US" sz="3400" dirty="0"/>
           </a:p>
         </p:txBody>
       </p:sp>
@@ -4155,34 +3918,51 @@
         </p:nvSpPr>
         <p:spPr>
           <a:xfrm>
-            <a:off x="3886200" y="2688336"/>
-            <a:ext cx="7315200" cy="749808"/>
-          </a:xfrm>
-          <a:prstGeom prst="rect">
-            <a:avLst/>
-          </a:prstGeom>
-          <a:noFill/>
-          <a:ln/>
-        </p:spPr>
-        <p:txBody>
-          <a:bodyPr wrap="square" lIns="0" tIns="0" rIns="0" bIns="0" rtlCol="0" anchor="ctr"/>
-          <a:lstStyle/>
-          <a:p>
-            <a:pPr indent="0" marL="0">
-              <a:buNone/>
-            </a:pPr>
-            <a:r>
-              <a:rPr lang="en-US" sz="1350" dirty="0">
-                <a:solidFill>
-                  <a:srgbClr val="10100F"/>
-                </a:solidFill>
-                <a:latin typeface="Calibri" pitchFamily="34" charset="0"/>
-                <a:ea typeface="Calibri" pitchFamily="34" charset="-122"/>
-                <a:cs typeface="Calibri" pitchFamily="34" charset="-120"/>
-              </a:rPr>
-              <a:t>Two CLIP variants and two Whisper checkpoints share an architecture, inflating their fields.</a:t>
-            </a:r>
-            <a:endParaRPr lang="en-US" sz="1350" dirty="0"/>
+            <a:off x="4590288" y="2679192"/>
+            <a:ext cx="2980944" cy="438912"/>
+          </a:xfrm>
+          <a:prstGeom prst="rect">
+            <a:avLst/>
+          </a:prstGeom>
+          <a:noFill/>
+          <a:ln/>
+        </p:spPr>
+        <p:txBody>
+          <a:bodyPr wrap="square" rtlCol="0" anchor="ctr"/>
+          <a:lstStyle/>
+          <a:p>
+            <a:pPr algn="ctr" indent="0" marL="0">
+              <a:buNone/>
+            </a:pPr>
+            <a:r>
+              <a:rPr lang="en-US" sz="1150" dirty="0">
+                <a:solidFill>
+                  <a:srgbClr val="5A5954"/>
+                </a:solidFill>
+                <a:latin typeface="Calibri" pitchFamily="34" charset="0"/>
+                <a:ea typeface="Calibri" pitchFamily="34" charset="-122"/>
+                <a:cs typeface="Calibri" pitchFamily="34" charset="-120"/>
+              </a:rPr>
+              <a:t>confirmed — all following</a:t>
+            </a:r>
+            <a:endParaRPr lang="en-US" sz="1150" dirty="0"/>
+          </a:p>
+          <a:p>
+            <a:pPr algn="ctr" indent="0" marL="0">
+              <a:buNone/>
+            </a:pPr>
+            <a:r>
+              <a:rPr lang="en-US" sz="1150" dirty="0">
+                <a:solidFill>
+                  <a:srgbClr val="5A5954"/>
+                </a:solidFill>
+                <a:latin typeface="Calibri" pitchFamily="34" charset="0"/>
+                <a:ea typeface="Calibri" pitchFamily="34" charset="-122"/>
+                <a:cs typeface="Calibri" pitchFamily="34" charset="-120"/>
+              </a:rPr>
+              <a:t>deductively from the design</a:t>
+            </a:r>
+            <a:endParaRPr lang="en-US" sz="1150" dirty="0"/>
           </a:p>
         </p:txBody>
       </p:sp>
@@ -4194,12 +3974,12 @@
         </p:nvSpPr>
         <p:spPr>
           <a:xfrm>
-            <a:off x="685800" y="3547872"/>
-            <a:ext cx="10789920" cy="749808"/>
+            <a:off x="8275320" y="1874520"/>
+            <a:ext cx="3200400" cy="1371600"/>
           </a:xfrm>
           <a:prstGeom prst="roundRect">
             <a:avLst>
-              <a:gd name="adj" fmla="val 9756"/>
+              <a:gd name="adj" fmla="val 6667"/>
             </a:avLst>
           </a:prstGeom>
           <a:solidFill>
@@ -4221,34 +4001,34 @@
         </p:nvSpPr>
         <p:spPr>
           <a:xfrm>
-            <a:off x="914400" y="3547872"/>
-            <a:ext cx="2834640" cy="749808"/>
-          </a:xfrm>
-          <a:prstGeom prst="rect">
-            <a:avLst/>
-          </a:prstGeom>
-          <a:noFill/>
-          <a:ln/>
-        </p:spPr>
-        <p:txBody>
-          <a:bodyPr wrap="square" lIns="0" tIns="0" rIns="0" bIns="0" rtlCol="0" anchor="ctr"/>
-          <a:lstStyle/>
-          <a:p>
-            <a:pPr indent="0" marL="0">
-              <a:buNone/>
-            </a:pPr>
-            <a:r>
-              <a:rPr lang="en-US" sz="1450" b="1" dirty="0">
-                <a:solidFill>
-                  <a:srgbClr val="EB6834"/>
-                </a:solidFill>
-                <a:latin typeface="Calibri" pitchFamily="34" charset="0"/>
-                <a:ea typeface="Calibri" pitchFamily="34" charset="-122"/>
-                <a:cs typeface="Calibri" pitchFamily="34" charset="-120"/>
-              </a:rPr>
-              <a:t>Blind to upstream error</a:t>
-            </a:r>
-            <a:endParaRPr lang="en-US" sz="1450" dirty="0"/>
+            <a:off x="8275320" y="2020824"/>
+            <a:ext cx="3200400" cy="658368"/>
+          </a:xfrm>
+          <a:prstGeom prst="rect">
+            <a:avLst/>
+          </a:prstGeom>
+          <a:noFill/>
+          <a:ln/>
+        </p:spPr>
+        <p:txBody>
+          <a:bodyPr wrap="square" rtlCol="0" anchor="ctr"/>
+          <a:lstStyle/>
+          <a:p>
+            <a:pPr algn="ctr" indent="0" marL="0">
+              <a:buNone/>
+            </a:pPr>
+            <a:r>
+              <a:rPr lang="en-US" sz="3400" b="1" dirty="0">
+                <a:solidFill>
+                  <a:srgbClr val="2A78D6"/>
+                </a:solidFill>
+                <a:latin typeface="Cambria" pitchFamily="34" charset="0"/>
+                <a:ea typeface="Cambria" pitchFamily="34" charset="-122"/>
+                <a:cs typeface="Cambria" pitchFamily="34" charset="-120"/>
+              </a:rPr>
+              <a:t>0</a:t>
+            </a:r>
+            <a:endParaRPr lang="en-US" sz="3400" dirty="0"/>
           </a:p>
         </p:txBody>
       </p:sp>
@@ -4260,24 +4040,87 @@
         </p:nvSpPr>
         <p:spPr>
           <a:xfrm>
-            <a:off x="3886200" y="3547872"/>
-            <a:ext cx="7315200" cy="749808"/>
-          </a:xfrm>
-          <a:prstGeom prst="rect">
-            <a:avLst/>
-          </a:prstGeom>
-          <a:noFill/>
-          <a:ln/>
-        </p:spPr>
-        <p:txBody>
-          <a:bodyPr wrap="square" lIns="0" tIns="0" rIns="0" bIns="0" rtlCol="0" anchor="ctr"/>
-          <a:lstStyle/>
-          <a:p>
-            <a:pPr indent="0" marL="0">
-              <a:buNone/>
-            </a:pPr>
-            <a:r>
-              <a:rPr lang="en-US" sz="1350" dirty="0">
+            <a:off x="8385048" y="2679192"/>
+            <a:ext cx="2980944" cy="438912"/>
+          </a:xfrm>
+          <a:prstGeom prst="rect">
+            <a:avLst/>
+          </a:prstGeom>
+          <a:noFill/>
+          <a:ln/>
+        </p:spPr>
+        <p:txBody>
+          <a:bodyPr wrap="square" rtlCol="0" anchor="ctr"/>
+          <a:lstStyle/>
+          <a:p>
+            <a:pPr algn="ctr" indent="0" marL="0">
+              <a:buNone/>
+            </a:pPr>
+            <a:r>
+              <a:rPr lang="en-US" sz="1150" dirty="0">
+                <a:solidFill>
+                  <a:srgbClr val="5A5954"/>
+                </a:solidFill>
+                <a:latin typeface="Calibri" pitchFamily="34" charset="0"/>
+                <a:ea typeface="Calibri" pitchFamily="34" charset="-122"/>
+                <a:cs typeface="Calibri" pitchFamily="34" charset="-120"/>
+              </a:rPr>
+              <a:t>empirical expectations about</a:t>
+            </a:r>
+            <a:endParaRPr lang="en-US" sz="1150" dirty="0"/>
+          </a:p>
+          <a:p>
+            <a:pPr algn="ctr" indent="0" marL="0">
+              <a:buNone/>
+            </a:pPr>
+            <a:r>
+              <a:rPr lang="en-US" sz="1150" dirty="0">
+                <a:solidFill>
+                  <a:srgbClr val="5A5954"/>
+                </a:solidFill>
+                <a:latin typeface="Calibri" pitchFamily="34" charset="0"/>
+                <a:ea typeface="Calibri" pitchFamily="34" charset="-122"/>
+                <a:cs typeface="Calibri" pitchFamily="34" charset="-120"/>
+              </a:rPr>
+              <a:t>scale or deliberation upheld</a:t>
+            </a:r>
+            <a:endParaRPr lang="en-US" sz="1150" dirty="0"/>
+          </a:p>
+        </p:txBody>
+      </p:sp>
+      <p:sp>
+        <p:nvSpPr>
+          <p:cNvPr id="13" name="Text 11"/>
+          <p:cNvSpPr txBox="1"/>
+          <p:nvPr/>
+        </p:nvSpPr>
+        <p:spPr>
+          <a:xfrm>
+            <a:off x="685800" y="3611880"/>
+            <a:ext cx="10789920" cy="2377440"/>
+          </a:xfrm>
+          <a:prstGeom prst="rect">
+            <a:avLst/>
+          </a:prstGeom>
+          <a:noFill/>
+          <a:ln/>
+        </p:spPr>
+        <p:txBody>
+          <a:bodyPr wrap="square" rtlCol="0" anchor="ctr"/>
+          <a:lstStyle/>
+          <a:p>
+            <a:pPr marL="342900" indent="-342900">
+              <a:lnSpc>
+                <a:spcPts val="2100"/>
+              </a:lnSpc>
+              <a:spcAft>
+                <a:spcPts val="900"/>
+              </a:spcAft>
+              <a:buSzPct val="100000"/>
+              <a:buChar char="•"/>
+            </a:pPr>
+            <a:r>
+              <a:rPr lang="en-US" sz="1500" dirty="0">
                 <a:solidFill>
                   <a:srgbClr val="10100F"/>
                 </a:solidFill>
@@ -4285,104 +4128,23 @@
                 <a:ea typeface="Calibri" pitchFamily="34" charset="-122"/>
                 <a:cs typeface="Calibri" pitchFamily="34" charset="-120"/>
               </a:rPr>
-              <a:t>If speech recognition fails, all three keyword extractors agree on the same wrong text.</a:t>
-            </a:r>
-            <a:endParaRPr lang="en-US" sz="1350" dirty="0"/>
-          </a:p>
-        </p:txBody>
-      </p:sp>
-      <p:sp>
-        <p:nvSpPr>
-          <p:cNvPr id="13" name="Shape 11"/>
-          <p:cNvSpPr/>
-          <p:nvPr/>
-        </p:nvSpPr>
-        <p:spPr>
-          <a:xfrm>
-            <a:off x="685800" y="4407408"/>
-            <a:ext cx="10789920" cy="749808"/>
-          </a:xfrm>
-          <a:prstGeom prst="roundRect">
-            <a:avLst>
-              <a:gd name="adj" fmla="val 9756"/>
-            </a:avLst>
-          </a:prstGeom>
-          <a:solidFill>
-            <a:srgbClr val="F4F6FA"/>
-          </a:solidFill>
-          <a:ln w="12700">
-            <a:solidFill>
-              <a:srgbClr val="F4F6FA"/>
-            </a:solidFill>
-            <a:prstDash val="solid"/>
-          </a:ln>
-        </p:spPr>
-      </p:sp>
-      <p:sp>
-        <p:nvSpPr>
-          <p:cNvPr id="14" name="Text 12"/>
-          <p:cNvSpPr txBox="1"/>
-          <p:nvPr/>
-        </p:nvSpPr>
-        <p:spPr>
-          <a:xfrm>
-            <a:off x="914400" y="4407408"/>
-            <a:ext cx="2834640" cy="749808"/>
-          </a:xfrm>
-          <a:prstGeom prst="rect">
-            <a:avLst/>
-          </a:prstGeom>
-          <a:noFill/>
-          <a:ln/>
-        </p:spPr>
-        <p:txBody>
-          <a:bodyPr wrap="square" lIns="0" tIns="0" rIns="0" bIns="0" rtlCol="0" anchor="ctr"/>
-          <a:lstStyle/>
-          <a:p>
-            <a:pPr indent="0" marL="0">
-              <a:buNone/>
-            </a:pPr>
-            <a:r>
-              <a:rPr lang="en-US" sz="1450" b="1" dirty="0">
-                <a:solidFill>
-                  <a:srgbClr val="EB6834"/>
-                </a:solidFill>
-                <a:latin typeface="Calibri" pitchFamily="34" charset="0"/>
-                <a:ea typeface="Calibri" pitchFamily="34" charset="-122"/>
-                <a:cs typeface="Calibri" pitchFamily="34" charset="-120"/>
-              </a:rPr>
-              <a:t>Underpowered ablations</a:t>
-            </a:r>
-            <a:endParaRPr lang="en-US" sz="1450" dirty="0"/>
-          </a:p>
-        </p:txBody>
-      </p:sp>
-      <p:sp>
-        <p:nvSpPr>
-          <p:cNvPr id="15" name="Text 13"/>
-          <p:cNvSpPr txBox="1"/>
-          <p:nvPr/>
-        </p:nvSpPr>
-        <p:spPr>
-          <a:xfrm>
-            <a:off x="3886200" y="4407408"/>
-            <a:ext cx="7315200" cy="749808"/>
-          </a:xfrm>
-          <a:prstGeom prst="rect">
-            <a:avLst/>
-          </a:prstGeom>
-          <a:noFill/>
-          <a:ln/>
-        </p:spPr>
-        <p:txBody>
-          <a:bodyPr wrap="square" lIns="0" tIns="0" rIns="0" bIns="0" rtlCol="0" anchor="ctr"/>
-          <a:lstStyle/>
-          <a:p>
-            <a:pPr indent="0" marL="0">
-              <a:buNone/>
-            </a:pPr>
-            <a:r>
-              <a:rPr lang="en-US" sz="1350" dirty="0">
+              <a:t>Agreement was expected to track task difficulty. It tracks source independence.</a:t>
+            </a:r>
+            <a:endParaRPr lang="en-US" sz="1500" dirty="0"/>
+          </a:p>
+          <a:p>
+            <a:pPr marL="342900" indent="-342900">
+              <a:lnSpc>
+                <a:spcPts val="2100"/>
+              </a:lnSpc>
+              <a:spcAft>
+                <a:spcPts val="900"/>
+              </a:spcAft>
+              <a:buSzPct val="100000"/>
+              <a:buChar char="•"/>
+            </a:pPr>
+            <a:r>
+              <a:rPr lang="en-US" sz="1500" dirty="0">
                 <a:solidFill>
                   <a:srgbClr val="10100F"/>
                 </a:solidFill>
@@ -4390,104 +4152,23 @@
                 <a:ea typeface="Calibri" pitchFamily="34" charset="-122"/>
                 <a:cs typeface="Calibri" pitchFamily="34" charset="-120"/>
               </a:rPr>
-              <a:t>RQ1 uses 8 clips and RQ3 uses 5. Directional, not significant.</a:t>
-            </a:r>
-            <a:endParaRPr lang="en-US" sz="1350" dirty="0"/>
-          </a:p>
-        </p:txBody>
-      </p:sp>
-      <p:sp>
-        <p:nvSpPr>
-          <p:cNvPr id="16" name="Shape 14"/>
-          <p:cNvSpPr/>
-          <p:nvPr/>
-        </p:nvSpPr>
-        <p:spPr>
-          <a:xfrm>
-            <a:off x="685800" y="5266944"/>
-            <a:ext cx="10789920" cy="749808"/>
-          </a:xfrm>
-          <a:prstGeom prst="roundRect">
-            <a:avLst>
-              <a:gd name="adj" fmla="val 9756"/>
-            </a:avLst>
-          </a:prstGeom>
-          <a:solidFill>
-            <a:srgbClr val="F4F6FA"/>
-          </a:solidFill>
-          <a:ln w="12700">
-            <a:solidFill>
-              <a:srgbClr val="F4F6FA"/>
-            </a:solidFill>
-            <a:prstDash val="solid"/>
-          </a:ln>
-        </p:spPr>
-      </p:sp>
-      <p:sp>
-        <p:nvSpPr>
-          <p:cNvPr id="17" name="Text 15"/>
-          <p:cNvSpPr txBox="1"/>
-          <p:nvPr/>
-        </p:nvSpPr>
-        <p:spPr>
-          <a:xfrm>
-            <a:off x="914400" y="5266944"/>
-            <a:ext cx="2834640" cy="749808"/>
-          </a:xfrm>
-          <a:prstGeom prst="rect">
-            <a:avLst/>
-          </a:prstGeom>
-          <a:noFill/>
-          <a:ln/>
-        </p:spPr>
-        <p:txBody>
-          <a:bodyPr wrap="square" lIns="0" tIns="0" rIns="0" bIns="0" rtlCol="0" anchor="ctr"/>
-          <a:lstStyle/>
-          <a:p>
-            <a:pPr indent="0" marL="0">
-              <a:buNone/>
-            </a:pPr>
-            <a:r>
-              <a:rPr lang="en-US" sz="1450" b="1" dirty="0">
-                <a:solidFill>
-                  <a:srgbClr val="EB6834"/>
-                </a:solidFill>
-                <a:latin typeface="Calibri" pitchFamily="34" charset="0"/>
-                <a:ea typeface="Calibri" pitchFamily="34" charset="-122"/>
-                <a:cs typeface="Calibri" pitchFamily="34" charset="-120"/>
-              </a:rPr>
-              <a:t>Single setting</a:t>
-            </a:r>
-            <a:endParaRPr lang="en-US" sz="1450" dirty="0"/>
-          </a:p>
-        </p:txBody>
-      </p:sp>
-      <p:sp>
-        <p:nvSpPr>
-          <p:cNvPr id="18" name="Text 16"/>
-          <p:cNvSpPr txBox="1"/>
-          <p:nvPr/>
-        </p:nvSpPr>
-        <p:spPr>
-          <a:xfrm>
-            <a:off x="3886200" y="5266944"/>
-            <a:ext cx="7315200" cy="749808"/>
-          </a:xfrm>
-          <a:prstGeom prst="rect">
-            <a:avLst/>
-          </a:prstGeom>
-          <a:noFill/>
-          <a:ln/>
-        </p:spPr>
-        <p:txBody>
-          <a:bodyPr wrap="square" lIns="0" tIns="0" rIns="0" bIns="0" rtlCol="0" anchor="ctr"/>
-          <a:lstStyle/>
-          <a:p>
-            <a:pPr indent="0" marL="0">
-              <a:buNone/>
-            </a:pPr>
-            <a:r>
-              <a:rPr lang="en-US" sz="1350" dirty="0">
+              <a:t>Three keyword extractors were expected to give three-way corroboration. They give one view, three times.</a:t>
+            </a:r>
+            <a:endParaRPr lang="en-US" sz="1500" dirty="0"/>
+          </a:p>
+          <a:p>
+            <a:pPr marL="342900" indent="-342900">
+              <a:lnSpc>
+                <a:spcPts val="2100"/>
+              </a:lnSpc>
+              <a:spcAft>
+                <a:spcPts val="900"/>
+              </a:spcAft>
+              <a:buSzPct val="100000"/>
+              <a:buChar char="•"/>
+            </a:pPr>
+            <a:r>
+              <a:rPr lang="en-US" sz="1500" dirty="0">
                 <a:solidFill>
                   <a:srgbClr val="10100F"/>
                 </a:solidFill>
@@ -4495,9 +4176,33 @@
                 <a:ea typeface="Calibri" pitchFamily="34" charset="-122"/>
                 <a:cs typeface="Calibri" pitchFamily="34" charset="-120"/>
               </a:rPr>
-              <a:t>One broadcaster, one city, one year, one run per model.</a:t>
-            </a:r>
-            <a:endParaRPr lang="en-US" sz="1350" dirty="0"/>
+              <a:t>Degradation was expected to affect fields comparably. The spread is thirteen-fold.</a:t>
+            </a:r>
+            <a:endParaRPr lang="en-US" sz="1500" dirty="0"/>
+          </a:p>
+          <a:p>
+            <a:pPr marL="342900" indent="-342900">
+              <a:lnSpc>
+                <a:spcPts val="2100"/>
+              </a:lnSpc>
+              <a:spcAft>
+                <a:spcPts val="900"/>
+              </a:spcAft>
+              <a:buSzPct val="100000"/>
+              <a:buChar char="•"/>
+            </a:pPr>
+            <a:r>
+              <a:rPr lang="en-US" sz="1500" dirty="0">
+                <a:solidFill>
+                  <a:srgbClr val="10100F"/>
+                </a:solidFill>
+                <a:latin typeface="Calibri" pitchFamily="34" charset="0"/>
+                <a:ea typeface="Calibri" pitchFamily="34" charset="-122"/>
+                <a:cs typeface="Calibri" pitchFamily="34" charset="-120"/>
+              </a:rPr>
+              <a:t>Larger models were expected to agree more. The smallest led.</a:t>
+            </a:r>
+            <a:endParaRPr lang="en-US" sz="1500" dirty="0"/>
           </a:p>
         </p:txBody>
       </p:sp>
@@ -4566,7 +4271,7 @@
                 <a:ea typeface="Calibri" pitchFamily="34" charset="-122"/>
                 <a:cs typeface="Calibri" pitchFamily="34" charset="-120"/>
               </a:rPr>
-              <a:t>FUTURE WORK</a:t>
+              <a:t>LIMITATIONS</a:t>
             </a:r>
             <a:endParaRPr lang="en-US" sz="1200" dirty="0"/>
           </a:p>
@@ -4605,7 +4310,7 @@
                 <a:ea typeface="Cambria" pitchFamily="34" charset="-122"/>
                 <a:cs typeface="Cambria" pitchFamily="34" charset="-120"/>
               </a:rPr>
-              <a:t>The next step is small and decisive</a:t>
+              <a:t>What these numbers do not say</a:t>
             </a:r>
             <a:endParaRPr lang="en-US" sz="3200" dirty="0"/>
           </a:p>
@@ -4619,20 +4324,20 @@
         </p:nvSpPr>
         <p:spPr>
           <a:xfrm>
-            <a:off x="685800" y="1783080"/>
-            <a:ext cx="10789920" cy="1371600"/>
+            <a:off x="685800" y="1828800"/>
+            <a:ext cx="10789920" cy="749808"/>
           </a:xfrm>
           <a:prstGeom prst="roundRect">
             <a:avLst>
-              <a:gd name="adj" fmla="val 8000"/>
+              <a:gd name="adj" fmla="val 9756"/>
             </a:avLst>
           </a:prstGeom>
           <a:solidFill>
-            <a:srgbClr val="12305B"/>
+            <a:srgbClr val="F4F6FA"/>
           </a:solidFill>
           <a:ln w="12700">
             <a:solidFill>
-              <a:srgbClr val="12305B"/>
+              <a:srgbClr val="F4F6FA"/>
             </a:solidFill>
             <a:prstDash val="solid"/>
           </a:ln>
@@ -4646,8 +4351,8 @@
         </p:nvSpPr>
         <p:spPr>
           <a:xfrm>
-            <a:off x="1051560" y="2057400"/>
-            <a:ext cx="10058400" cy="868680"/>
+            <a:off x="914400" y="1828800"/>
+            <a:ext cx="2834640" cy="749808"/>
           </a:xfrm>
           <a:prstGeom prst="rect">
             <a:avLst/>
@@ -4660,23 +4365,20 @@
           <a:lstStyle/>
           <a:p>
             <a:pPr indent="0" marL="0">
-              <a:lnSpc>
-                <a:spcPts val="2800"/>
-              </a:lnSpc>
-              <a:buNone/>
-            </a:pPr>
-            <a:r>
-              <a:rPr lang="en-US" sz="2000" i="1" dirty="0">
-                <a:solidFill>
-                  <a:srgbClr val="FFFFFF"/>
-                </a:solidFill>
-                <a:latin typeface="Cambria" pitchFamily="34" charset="0"/>
-                <a:ea typeface="Cambria" pitchFamily="34" charset="-122"/>
-                <a:cs typeface="Cambria" pitchFamily="34" charset="-120"/>
-              </a:rPr>
-              <a:t>A few hundred human-annotated clips would convert every agreement figure in this project into a measure of validity.</a:t>
-            </a:r>
-            <a:endParaRPr lang="en-US" sz="2000" dirty="0"/>
+              <a:buNone/>
+            </a:pPr>
+            <a:r>
+              <a:rPr lang="en-US" sz="1450" b="1" dirty="0">
+                <a:solidFill>
+                  <a:srgbClr val="EB6834"/>
+                </a:solidFill>
+                <a:latin typeface="Calibri" pitchFamily="34" charset="0"/>
+                <a:ea typeface="Calibri" pitchFamily="34" charset="-122"/>
+                <a:cs typeface="Calibri" pitchFamily="34" charset="-120"/>
+              </a:rPr>
+              <a:t>No human reference</a:t>
+            </a:r>
+            <a:endParaRPr lang="en-US" sz="1450" dirty="0"/>
           </a:p>
         </p:txBody>
       </p:sp>
@@ -4688,31 +4390,24 @@
         </p:nvSpPr>
         <p:spPr>
           <a:xfrm>
-            <a:off x="685800" y="3429000"/>
-            <a:ext cx="10789920" cy="2743200"/>
-          </a:xfrm>
-          <a:prstGeom prst="rect">
-            <a:avLst/>
-          </a:prstGeom>
-          <a:noFill/>
-          <a:ln/>
-        </p:spPr>
-        <p:txBody>
-          <a:bodyPr wrap="square" rtlCol="0" anchor="ctr"/>
-          <a:lstStyle/>
-          <a:p>
-            <a:pPr marL="342900" indent="-342900">
-              <a:lnSpc>
-                <a:spcPts val="2100"/>
-              </a:lnSpc>
-              <a:spcAft>
-                <a:spcPts val="900"/>
-              </a:spcAft>
-              <a:buSzPct val="100000"/>
-              <a:buChar char="•"/>
-            </a:pPr>
-            <a:r>
-              <a:rPr lang="en-US" sz="1500" dirty="0">
+            <a:off x="3886200" y="1828800"/>
+            <a:ext cx="7315200" cy="749808"/>
+          </a:xfrm>
+          <a:prstGeom prst="rect">
+            <a:avLst/>
+          </a:prstGeom>
+          <a:noFill/>
+          <a:ln/>
+        </p:spPr>
+        <p:txBody>
+          <a:bodyPr wrap="square" lIns="0" tIns="0" rIns="0" bIns="0" rtlCol="0" anchor="ctr"/>
+          <a:lstStyle/>
+          <a:p>
+            <a:pPr indent="0" marL="0">
+              <a:buNone/>
+            </a:pPr>
+            <a:r>
+              <a:rPr lang="en-US" sz="1350" dirty="0">
                 <a:solidFill>
                   <a:srgbClr val="10100F"/>
                 </a:solidFill>
@@ -4720,23 +4415,104 @@
                 <a:ea typeface="Calibri" pitchFamily="34" charset="-122"/>
                 <a:cs typeface="Calibri" pitchFamily="34" charset="-120"/>
               </a:rPr>
-              <a:t>Persist per-family candidate lists so the CLIP-pair inflation can be measured rather than declared.</a:t>
-            </a:r>
-            <a:endParaRPr lang="en-US" sz="1500" dirty="0"/>
-          </a:p>
-          <a:p>
-            <a:pPr marL="342900" indent="-342900">
-              <a:lnSpc>
-                <a:spcPts val="2100"/>
-              </a:lnSpc>
-              <a:spcAft>
-                <a:spcPts val="900"/>
-              </a:spcAft>
-              <a:buSzPct val="100000"/>
-              <a:buChar char="•"/>
-            </a:pPr>
-            <a:r>
-              <a:rPr lang="en-US" sz="1500" dirty="0">
+              <a:t>Every figure measures corroboration between automatic sources — never accuracy.</a:t>
+            </a:r>
+            <a:endParaRPr lang="en-US" sz="1350" dirty="0"/>
+          </a:p>
+        </p:txBody>
+      </p:sp>
+      <p:sp>
+        <p:nvSpPr>
+          <p:cNvPr id="7" name="Shape 5"/>
+          <p:cNvSpPr/>
+          <p:nvPr/>
+        </p:nvSpPr>
+        <p:spPr>
+          <a:xfrm>
+            <a:off x="685800" y="2688336"/>
+            <a:ext cx="10789920" cy="749808"/>
+          </a:xfrm>
+          <a:prstGeom prst="roundRect">
+            <a:avLst>
+              <a:gd name="adj" fmla="val 9756"/>
+            </a:avLst>
+          </a:prstGeom>
+          <a:solidFill>
+            <a:srgbClr val="F4F6FA"/>
+          </a:solidFill>
+          <a:ln w="12700">
+            <a:solidFill>
+              <a:srgbClr val="F4F6FA"/>
+            </a:solidFill>
+            <a:prstDash val="solid"/>
+          </a:ln>
+        </p:spPr>
+      </p:sp>
+      <p:sp>
+        <p:nvSpPr>
+          <p:cNvPr id="8" name="Text 6"/>
+          <p:cNvSpPr txBox="1"/>
+          <p:nvPr/>
+        </p:nvSpPr>
+        <p:spPr>
+          <a:xfrm>
+            <a:off x="914400" y="2688336"/>
+            <a:ext cx="2834640" cy="749808"/>
+          </a:xfrm>
+          <a:prstGeom prst="rect">
+            <a:avLst/>
+          </a:prstGeom>
+          <a:noFill/>
+          <a:ln/>
+        </p:spPr>
+        <p:txBody>
+          <a:bodyPr wrap="square" lIns="0" tIns="0" rIns="0" bIns="0" rtlCol="0" anchor="ctr"/>
+          <a:lstStyle/>
+          <a:p>
+            <a:pPr indent="0" marL="0">
+              <a:buNone/>
+            </a:pPr>
+            <a:r>
+              <a:rPr lang="en-US" sz="1450" b="1" dirty="0">
+                <a:solidFill>
+                  <a:srgbClr val="EB6834"/>
+                </a:solidFill>
+                <a:latin typeface="Calibri" pitchFamily="34" charset="0"/>
+                <a:ea typeface="Calibri" pitchFamily="34" charset="-122"/>
+                <a:cs typeface="Calibri" pitchFamily="34" charset="-120"/>
+              </a:rPr>
+              <a:t>Correlated sources</a:t>
+            </a:r>
+            <a:endParaRPr lang="en-US" sz="1450" dirty="0"/>
+          </a:p>
+        </p:txBody>
+      </p:sp>
+      <p:sp>
+        <p:nvSpPr>
+          <p:cNvPr id="9" name="Text 7"/>
+          <p:cNvSpPr txBox="1"/>
+          <p:nvPr/>
+        </p:nvSpPr>
+        <p:spPr>
+          <a:xfrm>
+            <a:off x="3886200" y="2688336"/>
+            <a:ext cx="7315200" cy="749808"/>
+          </a:xfrm>
+          <a:prstGeom prst="rect">
+            <a:avLst/>
+          </a:prstGeom>
+          <a:noFill/>
+          <a:ln/>
+        </p:spPr>
+        <p:txBody>
+          <a:bodyPr wrap="square" lIns="0" tIns="0" rIns="0" bIns="0" rtlCol="0" anchor="ctr"/>
+          <a:lstStyle/>
+          <a:p>
+            <a:pPr indent="0" marL="0">
+              <a:buNone/>
+            </a:pPr>
+            <a:r>
+              <a:rPr lang="en-US" sz="1350" dirty="0">
                 <a:solidFill>
                   <a:srgbClr val="10100F"/>
                 </a:solidFill>
@@ -4744,23 +4520,104 @@
                 <a:ea typeface="Calibri" pitchFamily="34" charset="-122"/>
                 <a:cs typeface="Calibri" pitchFamily="34" charset="-120"/>
               </a:rPr>
-              <a:t>Replace equal weighting with measured per-source reliability weights.</a:t>
-            </a:r>
-            <a:endParaRPr lang="en-US" sz="1500" dirty="0"/>
-          </a:p>
-          <a:p>
-            <a:pPr marL="342900" indent="-342900">
-              <a:lnSpc>
-                <a:spcPts val="2100"/>
-              </a:lnSpc>
-              <a:spcAft>
-                <a:spcPts val="900"/>
-              </a:spcAft>
-              <a:buSzPct val="100000"/>
-              <a:buChar char="•"/>
-            </a:pPr>
-            <a:r>
-              <a:rPr lang="en-US" sz="1500" dirty="0">
+              <a:t>Two CLIP variants and two Whisper checkpoints share an architecture, inflating their fields.</a:t>
+            </a:r>
+            <a:endParaRPr lang="en-US" sz="1350" dirty="0"/>
+          </a:p>
+        </p:txBody>
+      </p:sp>
+      <p:sp>
+        <p:nvSpPr>
+          <p:cNvPr id="10" name="Shape 8"/>
+          <p:cNvSpPr/>
+          <p:nvPr/>
+        </p:nvSpPr>
+        <p:spPr>
+          <a:xfrm>
+            <a:off x="685800" y="3547872"/>
+            <a:ext cx="10789920" cy="749808"/>
+          </a:xfrm>
+          <a:prstGeom prst="roundRect">
+            <a:avLst>
+              <a:gd name="adj" fmla="val 9756"/>
+            </a:avLst>
+          </a:prstGeom>
+          <a:solidFill>
+            <a:srgbClr val="F4F6FA"/>
+          </a:solidFill>
+          <a:ln w="12700">
+            <a:solidFill>
+              <a:srgbClr val="F4F6FA"/>
+            </a:solidFill>
+            <a:prstDash val="solid"/>
+          </a:ln>
+        </p:spPr>
+      </p:sp>
+      <p:sp>
+        <p:nvSpPr>
+          <p:cNvPr id="11" name="Text 9"/>
+          <p:cNvSpPr txBox="1"/>
+          <p:nvPr/>
+        </p:nvSpPr>
+        <p:spPr>
+          <a:xfrm>
+            <a:off x="914400" y="3547872"/>
+            <a:ext cx="2834640" cy="749808"/>
+          </a:xfrm>
+          <a:prstGeom prst="rect">
+            <a:avLst/>
+          </a:prstGeom>
+          <a:noFill/>
+          <a:ln/>
+        </p:spPr>
+        <p:txBody>
+          <a:bodyPr wrap="square" lIns="0" tIns="0" rIns="0" bIns="0" rtlCol="0" anchor="ctr"/>
+          <a:lstStyle/>
+          <a:p>
+            <a:pPr indent="0" marL="0">
+              <a:buNone/>
+            </a:pPr>
+            <a:r>
+              <a:rPr lang="en-US" sz="1450" b="1" dirty="0">
+                <a:solidFill>
+                  <a:srgbClr val="EB6834"/>
+                </a:solidFill>
+                <a:latin typeface="Calibri" pitchFamily="34" charset="0"/>
+                <a:ea typeface="Calibri" pitchFamily="34" charset="-122"/>
+                <a:cs typeface="Calibri" pitchFamily="34" charset="-120"/>
+              </a:rPr>
+              <a:t>Blind to upstream error</a:t>
+            </a:r>
+            <a:endParaRPr lang="en-US" sz="1450" dirty="0"/>
+          </a:p>
+        </p:txBody>
+      </p:sp>
+      <p:sp>
+        <p:nvSpPr>
+          <p:cNvPr id="12" name="Text 10"/>
+          <p:cNvSpPr txBox="1"/>
+          <p:nvPr/>
+        </p:nvSpPr>
+        <p:spPr>
+          <a:xfrm>
+            <a:off x="3886200" y="3547872"/>
+            <a:ext cx="7315200" cy="749808"/>
+          </a:xfrm>
+          <a:prstGeom prst="rect">
+            <a:avLst/>
+          </a:prstGeom>
+          <a:noFill/>
+          <a:ln/>
+        </p:spPr>
+        <p:txBody>
+          <a:bodyPr wrap="square" lIns="0" tIns="0" rIns="0" bIns="0" rtlCol="0" anchor="ctr"/>
+          <a:lstStyle/>
+          <a:p>
+            <a:pPr indent="0" marL="0">
+              <a:buNone/>
+            </a:pPr>
+            <a:r>
+              <a:rPr lang="en-US" sz="1350" dirty="0">
                 <a:solidFill>
                   <a:srgbClr val="10100F"/>
                 </a:solidFill>
@@ -4768,23 +4625,104 @@
                 <a:ea typeface="Calibri" pitchFamily="34" charset="-122"/>
                 <a:cs typeface="Calibri" pitchFamily="34" charset="-120"/>
               </a:rPr>
-              <a:t>Add an audio-capable model to the benchmark, and a video-native one.</a:t>
-            </a:r>
-            <a:endParaRPr lang="en-US" sz="1500" dirty="0"/>
-          </a:p>
-          <a:p>
-            <a:pPr marL="342900" indent="-342900">
-              <a:lnSpc>
-                <a:spcPts val="2100"/>
-              </a:lnSpc>
-              <a:spcAft>
-                <a:spcPts val="900"/>
-              </a:spcAft>
-              <a:buSzPct val="100000"/>
-              <a:buChar char="•"/>
-            </a:pPr>
-            <a:r>
-              <a:rPr lang="en-US" sz="1500" dirty="0">
+              <a:t>If speech recognition fails, all three keyword extractors agree on the same wrong text.</a:t>
+            </a:r>
+            <a:endParaRPr lang="en-US" sz="1350" dirty="0"/>
+          </a:p>
+        </p:txBody>
+      </p:sp>
+      <p:sp>
+        <p:nvSpPr>
+          <p:cNvPr id="13" name="Shape 11"/>
+          <p:cNvSpPr/>
+          <p:nvPr/>
+        </p:nvSpPr>
+        <p:spPr>
+          <a:xfrm>
+            <a:off x="685800" y="4407408"/>
+            <a:ext cx="10789920" cy="749808"/>
+          </a:xfrm>
+          <a:prstGeom prst="roundRect">
+            <a:avLst>
+              <a:gd name="adj" fmla="val 9756"/>
+            </a:avLst>
+          </a:prstGeom>
+          <a:solidFill>
+            <a:srgbClr val="F4F6FA"/>
+          </a:solidFill>
+          <a:ln w="12700">
+            <a:solidFill>
+              <a:srgbClr val="F4F6FA"/>
+            </a:solidFill>
+            <a:prstDash val="solid"/>
+          </a:ln>
+        </p:spPr>
+      </p:sp>
+      <p:sp>
+        <p:nvSpPr>
+          <p:cNvPr id="14" name="Text 12"/>
+          <p:cNvSpPr txBox="1"/>
+          <p:nvPr/>
+        </p:nvSpPr>
+        <p:spPr>
+          <a:xfrm>
+            <a:off x="914400" y="4407408"/>
+            <a:ext cx="2834640" cy="749808"/>
+          </a:xfrm>
+          <a:prstGeom prst="rect">
+            <a:avLst/>
+          </a:prstGeom>
+          <a:noFill/>
+          <a:ln/>
+        </p:spPr>
+        <p:txBody>
+          <a:bodyPr wrap="square" lIns="0" tIns="0" rIns="0" bIns="0" rtlCol="0" anchor="ctr"/>
+          <a:lstStyle/>
+          <a:p>
+            <a:pPr indent="0" marL="0">
+              <a:buNone/>
+            </a:pPr>
+            <a:r>
+              <a:rPr lang="en-US" sz="1450" b="1" dirty="0">
+                <a:solidFill>
+                  <a:srgbClr val="EB6834"/>
+                </a:solidFill>
+                <a:latin typeface="Calibri" pitchFamily="34" charset="0"/>
+                <a:ea typeface="Calibri" pitchFamily="34" charset="-122"/>
+                <a:cs typeface="Calibri" pitchFamily="34" charset="-120"/>
+              </a:rPr>
+              <a:t>Underpowered ablations</a:t>
+            </a:r>
+            <a:endParaRPr lang="en-US" sz="1450" dirty="0"/>
+          </a:p>
+        </p:txBody>
+      </p:sp>
+      <p:sp>
+        <p:nvSpPr>
+          <p:cNvPr id="15" name="Text 13"/>
+          <p:cNvSpPr txBox="1"/>
+          <p:nvPr/>
+        </p:nvSpPr>
+        <p:spPr>
+          <a:xfrm>
+            <a:off x="3886200" y="4407408"/>
+            <a:ext cx="7315200" cy="749808"/>
+          </a:xfrm>
+          <a:prstGeom prst="rect">
+            <a:avLst/>
+          </a:prstGeom>
+          <a:noFill/>
+          <a:ln/>
+        </p:spPr>
+        <p:txBody>
+          <a:bodyPr wrap="square" lIns="0" tIns="0" rIns="0" bIns="0" rtlCol="0" anchor="ctr"/>
+          <a:lstStyle/>
+          <a:p>
+            <a:pPr indent="0" marL="0">
+              <a:buNone/>
+            </a:pPr>
+            <a:r>
+              <a:rPr lang="en-US" sz="1350" dirty="0">
                 <a:solidFill>
                   <a:srgbClr val="10100F"/>
                 </a:solidFill>
@@ -4792,23 +4730,104 @@
                 <a:ea typeface="Calibri" pitchFamily="34" charset="-122"/>
                 <a:cs typeface="Calibri" pitchFamily="34" charset="-120"/>
               </a:rPr>
-              <a:t>Re-annotate the shot-boundary partition — 72.2% of published clips span at least one shot cut.</a:t>
-            </a:r>
-            <a:endParaRPr lang="en-US" sz="1500" dirty="0"/>
-          </a:p>
-          <a:p>
-            <a:pPr marL="342900" indent="-342900">
-              <a:lnSpc>
-                <a:spcPts val="2100"/>
-              </a:lnSpc>
-              <a:spcAft>
-                <a:spcPts val="900"/>
-              </a:spcAft>
-              <a:buSzPct val="100000"/>
-              <a:buChar char="•"/>
-            </a:pPr>
-            <a:r>
-              <a:rPr lang="en-US" sz="1500" dirty="0">
+              <a:t>RQ1 uses 8 clips and RQ3 uses 5. Directional, not significant.</a:t>
+            </a:r>
+            <a:endParaRPr lang="en-US" sz="1350" dirty="0"/>
+          </a:p>
+        </p:txBody>
+      </p:sp>
+      <p:sp>
+        <p:nvSpPr>
+          <p:cNvPr id="16" name="Shape 14"/>
+          <p:cNvSpPr/>
+          <p:nvPr/>
+        </p:nvSpPr>
+        <p:spPr>
+          <a:xfrm>
+            <a:off x="685800" y="5266944"/>
+            <a:ext cx="10789920" cy="749808"/>
+          </a:xfrm>
+          <a:prstGeom prst="roundRect">
+            <a:avLst>
+              <a:gd name="adj" fmla="val 9756"/>
+            </a:avLst>
+          </a:prstGeom>
+          <a:solidFill>
+            <a:srgbClr val="F4F6FA"/>
+          </a:solidFill>
+          <a:ln w="12700">
+            <a:solidFill>
+              <a:srgbClr val="F4F6FA"/>
+            </a:solidFill>
+            <a:prstDash val="solid"/>
+          </a:ln>
+        </p:spPr>
+      </p:sp>
+      <p:sp>
+        <p:nvSpPr>
+          <p:cNvPr id="17" name="Text 15"/>
+          <p:cNvSpPr txBox="1"/>
+          <p:nvPr/>
+        </p:nvSpPr>
+        <p:spPr>
+          <a:xfrm>
+            <a:off x="914400" y="5266944"/>
+            <a:ext cx="2834640" cy="749808"/>
+          </a:xfrm>
+          <a:prstGeom prst="rect">
+            <a:avLst/>
+          </a:prstGeom>
+          <a:noFill/>
+          <a:ln/>
+        </p:spPr>
+        <p:txBody>
+          <a:bodyPr wrap="square" lIns="0" tIns="0" rIns="0" bIns="0" rtlCol="0" anchor="ctr"/>
+          <a:lstStyle/>
+          <a:p>
+            <a:pPr indent="0" marL="0">
+              <a:buNone/>
+            </a:pPr>
+            <a:r>
+              <a:rPr lang="en-US" sz="1450" b="1" dirty="0">
+                <a:solidFill>
+                  <a:srgbClr val="EB6834"/>
+                </a:solidFill>
+                <a:latin typeface="Calibri" pitchFamily="34" charset="0"/>
+                <a:ea typeface="Calibri" pitchFamily="34" charset="-122"/>
+                <a:cs typeface="Calibri" pitchFamily="34" charset="-120"/>
+              </a:rPr>
+              <a:t>Single setting</a:t>
+            </a:r>
+            <a:endParaRPr lang="en-US" sz="1450" dirty="0"/>
+          </a:p>
+        </p:txBody>
+      </p:sp>
+      <p:sp>
+        <p:nvSpPr>
+          <p:cNvPr id="18" name="Text 16"/>
+          <p:cNvSpPr txBox="1"/>
+          <p:nvPr/>
+        </p:nvSpPr>
+        <p:spPr>
+          <a:xfrm>
+            <a:off x="3886200" y="5266944"/>
+            <a:ext cx="7315200" cy="749808"/>
+          </a:xfrm>
+          <a:prstGeom prst="rect">
+            <a:avLst/>
+          </a:prstGeom>
+          <a:noFill/>
+          <a:ln/>
+        </p:spPr>
+        <p:txBody>
+          <a:bodyPr wrap="square" lIns="0" tIns="0" rIns="0" bIns="0" rtlCol="0" anchor="ctr"/>
+          <a:lstStyle/>
+          <a:p>
+            <a:pPr indent="0" marL="0">
+              <a:buNone/>
+            </a:pPr>
+            <a:r>
+              <a:rPr lang="en-US" sz="1350" dirty="0">
                 <a:solidFill>
                   <a:srgbClr val="10100F"/>
                 </a:solidFill>
@@ -4816,9 +4835,9 @@
                 <a:ea typeface="Calibri" pitchFamily="34" charset="-122"/>
                 <a:cs typeface="Calibri" pitchFamily="34" charset="-120"/>
               </a:rPr>
-              <a:t>Gate the ASR stage on Whisper’s own language identification, and add speaker diarisation.</a:t>
-            </a:r>
-            <a:endParaRPr lang="en-US" sz="1500" dirty="0"/>
+              <a:t>One broadcaster, one city, one year, one run per model.</a:t>
+            </a:r>
+            <a:endParaRPr lang="en-US" sz="1350" dirty="0"/>
           </a:p>
         </p:txBody>
       </p:sp>
@@ -4833,6 +4852,327 @@
 <file path=ppt/slides/slide16.xml><?xml version="1.0" encoding="utf-8"?>
 <p:sld xmlns:a="http://schemas.openxmlformats.org/drawingml/2006/main" xmlns:r="http://schemas.openxmlformats.org/officeDocument/2006/relationships" xmlns:p="http://schemas.openxmlformats.org/presentationml/2006/main">
   <p:cSld name="Slide 16">
+    <p:bg>
+      <p:bgPr>
+        <a:solidFill>
+          <a:srgbClr val="FFFFFF"/>
+        </a:solidFill>
+      </p:bgPr>
+    </p:bg>
+    <p:spTree>
+      <p:nvGrpSpPr>
+        <p:cNvPr id="1" name=""/>
+        <p:cNvGrpSpPr/>
+        <p:nvPr/>
+      </p:nvGrpSpPr>
+      <p:grpSpPr>
+        <a:xfrm>
+          <a:off x="0" y="0"/>
+          <a:ext cx="0" cy="0"/>
+          <a:chOff x="0" y="0"/>
+          <a:chExt cx="0" cy="0"/>
+        </a:xfrm>
+      </p:grpSpPr>
+      <p:sp>
+        <p:nvSpPr>
+          <p:cNvPr id="2" name="Text 0"/>
+          <p:cNvSpPr txBox="1"/>
+          <p:nvPr/>
+        </p:nvSpPr>
+        <p:spPr>
+          <a:xfrm>
+            <a:off x="685800" y="384048"/>
+            <a:ext cx="7315200" cy="274320"/>
+          </a:xfrm>
+          <a:prstGeom prst="rect">
+            <a:avLst/>
+          </a:prstGeom>
+          <a:noFill/>
+          <a:ln/>
+        </p:spPr>
+        <p:txBody>
+          <a:bodyPr wrap="square" lIns="0" tIns="0" rIns="0" bIns="0" rtlCol="0" anchor="ctr"/>
+          <a:lstStyle/>
+          <a:p>
+            <a:pPr indent="0" marL="0">
+              <a:buNone/>
+            </a:pPr>
+            <a:r>
+              <a:rPr lang="en-US" sz="1200" b="1" spc="140" kern="0" dirty="0">
+                <a:solidFill>
+                  <a:srgbClr val="EB6834"/>
+                </a:solidFill>
+                <a:latin typeface="Calibri" pitchFamily="34" charset="0"/>
+                <a:ea typeface="Calibri" pitchFamily="34" charset="-122"/>
+                <a:cs typeface="Calibri" pitchFamily="34" charset="-120"/>
+              </a:rPr>
+              <a:t>FUTURE WORK</a:t>
+            </a:r>
+            <a:endParaRPr lang="en-US" sz="1200" dirty="0"/>
+          </a:p>
+        </p:txBody>
+      </p:sp>
+      <p:sp>
+        <p:nvSpPr>
+          <p:cNvPr id="3" name="Text 1"/>
+          <p:cNvSpPr txBox="1"/>
+          <p:nvPr/>
+        </p:nvSpPr>
+        <p:spPr>
+          <a:xfrm>
+            <a:off x="685800" y="676656"/>
+            <a:ext cx="10789920" cy="777240"/>
+          </a:xfrm>
+          <a:prstGeom prst="rect">
+            <a:avLst/>
+          </a:prstGeom>
+          <a:noFill/>
+          <a:ln/>
+        </p:spPr>
+        <p:txBody>
+          <a:bodyPr wrap="square" lIns="0" tIns="0" rIns="0" bIns="0" rtlCol="0" anchor="ctr"/>
+          <a:lstStyle/>
+          <a:p>
+            <a:pPr indent="0" marL="0">
+              <a:buNone/>
+            </a:pPr>
+            <a:r>
+              <a:rPr lang="en-US" sz="3200" b="1" dirty="0">
+                <a:solidFill>
+                  <a:srgbClr val="12305B"/>
+                </a:solidFill>
+                <a:latin typeface="Cambria" pitchFamily="34" charset="0"/>
+                <a:ea typeface="Cambria" pitchFamily="34" charset="-122"/>
+                <a:cs typeface="Cambria" pitchFamily="34" charset="-120"/>
+              </a:rPr>
+              <a:t>The next step is small and decisive</a:t>
+            </a:r>
+            <a:endParaRPr lang="en-US" sz="3200" dirty="0"/>
+          </a:p>
+        </p:txBody>
+      </p:sp>
+      <p:sp>
+        <p:nvSpPr>
+          <p:cNvPr id="4" name="Shape 2"/>
+          <p:cNvSpPr/>
+          <p:nvPr/>
+        </p:nvSpPr>
+        <p:spPr>
+          <a:xfrm>
+            <a:off x="685800" y="1783080"/>
+            <a:ext cx="10789920" cy="1371600"/>
+          </a:xfrm>
+          <a:prstGeom prst="roundRect">
+            <a:avLst>
+              <a:gd name="adj" fmla="val 8000"/>
+            </a:avLst>
+          </a:prstGeom>
+          <a:solidFill>
+            <a:srgbClr val="12305B"/>
+          </a:solidFill>
+          <a:ln w="12700">
+            <a:solidFill>
+              <a:srgbClr val="12305B"/>
+            </a:solidFill>
+            <a:prstDash val="solid"/>
+          </a:ln>
+        </p:spPr>
+      </p:sp>
+      <p:sp>
+        <p:nvSpPr>
+          <p:cNvPr id="5" name="Text 3"/>
+          <p:cNvSpPr txBox="1"/>
+          <p:nvPr/>
+        </p:nvSpPr>
+        <p:spPr>
+          <a:xfrm>
+            <a:off x="1051560" y="2057400"/>
+            <a:ext cx="10058400" cy="868680"/>
+          </a:xfrm>
+          <a:prstGeom prst="rect">
+            <a:avLst/>
+          </a:prstGeom>
+          <a:noFill/>
+          <a:ln/>
+        </p:spPr>
+        <p:txBody>
+          <a:bodyPr wrap="square" lIns="0" tIns="0" rIns="0" bIns="0" rtlCol="0" anchor="ctr"/>
+          <a:lstStyle/>
+          <a:p>
+            <a:pPr indent="0" marL="0">
+              <a:lnSpc>
+                <a:spcPts val="2800"/>
+              </a:lnSpc>
+              <a:buNone/>
+            </a:pPr>
+            <a:r>
+              <a:rPr lang="en-US" sz="2000" i="1" dirty="0">
+                <a:solidFill>
+                  <a:srgbClr val="FFFFFF"/>
+                </a:solidFill>
+                <a:latin typeface="Cambria" pitchFamily="34" charset="0"/>
+                <a:ea typeface="Cambria" pitchFamily="34" charset="-122"/>
+                <a:cs typeface="Cambria" pitchFamily="34" charset="-120"/>
+              </a:rPr>
+              <a:t>A few hundred human-annotated clips would convert every agreement figure in this project into a measure of validity.</a:t>
+            </a:r>
+            <a:endParaRPr lang="en-US" sz="2000" dirty="0"/>
+          </a:p>
+        </p:txBody>
+      </p:sp>
+      <p:sp>
+        <p:nvSpPr>
+          <p:cNvPr id="6" name="Text 4"/>
+          <p:cNvSpPr txBox="1"/>
+          <p:nvPr/>
+        </p:nvSpPr>
+        <p:spPr>
+          <a:xfrm>
+            <a:off x="685800" y="3429000"/>
+            <a:ext cx="10789920" cy="2743200"/>
+          </a:xfrm>
+          <a:prstGeom prst="rect">
+            <a:avLst/>
+          </a:prstGeom>
+          <a:noFill/>
+          <a:ln/>
+        </p:spPr>
+        <p:txBody>
+          <a:bodyPr wrap="square" rtlCol="0" anchor="ctr"/>
+          <a:lstStyle/>
+          <a:p>
+            <a:pPr marL="342900" indent="-342900">
+              <a:lnSpc>
+                <a:spcPts val="2100"/>
+              </a:lnSpc>
+              <a:spcAft>
+                <a:spcPts val="900"/>
+              </a:spcAft>
+              <a:buSzPct val="100000"/>
+              <a:buChar char="•"/>
+            </a:pPr>
+            <a:r>
+              <a:rPr lang="en-US" sz="1500" dirty="0">
+                <a:solidFill>
+                  <a:srgbClr val="10100F"/>
+                </a:solidFill>
+                <a:latin typeface="Calibri" pitchFamily="34" charset="0"/>
+                <a:ea typeface="Calibri" pitchFamily="34" charset="-122"/>
+                <a:cs typeface="Calibri" pitchFamily="34" charset="-120"/>
+              </a:rPr>
+              <a:t>Persist per-family candidate lists so the CLIP-pair inflation can be measured rather than declared.</a:t>
+            </a:r>
+            <a:endParaRPr lang="en-US" sz="1500" dirty="0"/>
+          </a:p>
+          <a:p>
+            <a:pPr marL="342900" indent="-342900">
+              <a:lnSpc>
+                <a:spcPts val="2100"/>
+              </a:lnSpc>
+              <a:spcAft>
+                <a:spcPts val="900"/>
+              </a:spcAft>
+              <a:buSzPct val="100000"/>
+              <a:buChar char="•"/>
+            </a:pPr>
+            <a:r>
+              <a:rPr lang="en-US" sz="1500" dirty="0">
+                <a:solidFill>
+                  <a:srgbClr val="10100F"/>
+                </a:solidFill>
+                <a:latin typeface="Calibri" pitchFamily="34" charset="0"/>
+                <a:ea typeface="Calibri" pitchFamily="34" charset="-122"/>
+                <a:cs typeface="Calibri" pitchFamily="34" charset="-120"/>
+              </a:rPr>
+              <a:t>Replace equal weighting with measured per-source reliability weights.</a:t>
+            </a:r>
+            <a:endParaRPr lang="en-US" sz="1500" dirty="0"/>
+          </a:p>
+          <a:p>
+            <a:pPr marL="342900" indent="-342900">
+              <a:lnSpc>
+                <a:spcPts val="2100"/>
+              </a:lnSpc>
+              <a:spcAft>
+                <a:spcPts val="900"/>
+              </a:spcAft>
+              <a:buSzPct val="100000"/>
+              <a:buChar char="•"/>
+            </a:pPr>
+            <a:r>
+              <a:rPr lang="en-US" sz="1500" dirty="0">
+                <a:solidFill>
+                  <a:srgbClr val="10100F"/>
+                </a:solidFill>
+                <a:latin typeface="Calibri" pitchFamily="34" charset="0"/>
+                <a:ea typeface="Calibri" pitchFamily="34" charset="-122"/>
+                <a:cs typeface="Calibri" pitchFamily="34" charset="-120"/>
+              </a:rPr>
+              <a:t>Add an audio-capable model to the benchmark, and a video-native one.</a:t>
+            </a:r>
+            <a:endParaRPr lang="en-US" sz="1500" dirty="0"/>
+          </a:p>
+          <a:p>
+            <a:pPr marL="342900" indent="-342900">
+              <a:lnSpc>
+                <a:spcPts val="2100"/>
+              </a:lnSpc>
+              <a:spcAft>
+                <a:spcPts val="900"/>
+              </a:spcAft>
+              <a:buSzPct val="100000"/>
+              <a:buChar char="•"/>
+            </a:pPr>
+            <a:r>
+              <a:rPr lang="en-US" sz="1500" dirty="0">
+                <a:solidFill>
+                  <a:srgbClr val="10100F"/>
+                </a:solidFill>
+                <a:latin typeface="Calibri" pitchFamily="34" charset="0"/>
+                <a:ea typeface="Calibri" pitchFamily="34" charset="-122"/>
+                <a:cs typeface="Calibri" pitchFamily="34" charset="-120"/>
+              </a:rPr>
+              <a:t>Re-annotate the shot-boundary partition — 72.2% of published clips span at least one shot cut.</a:t>
+            </a:r>
+            <a:endParaRPr lang="en-US" sz="1500" dirty="0"/>
+          </a:p>
+          <a:p>
+            <a:pPr marL="342900" indent="-342900">
+              <a:lnSpc>
+                <a:spcPts val="2100"/>
+              </a:lnSpc>
+              <a:spcAft>
+                <a:spcPts val="900"/>
+              </a:spcAft>
+              <a:buSzPct val="100000"/>
+              <a:buChar char="•"/>
+            </a:pPr>
+            <a:r>
+              <a:rPr lang="en-US" sz="1500" dirty="0">
+                <a:solidFill>
+                  <a:srgbClr val="10100F"/>
+                </a:solidFill>
+                <a:latin typeface="Calibri" pitchFamily="34" charset="0"/>
+                <a:ea typeface="Calibri" pitchFamily="34" charset="-122"/>
+                <a:cs typeface="Calibri" pitchFamily="34" charset="-120"/>
+              </a:rPr>
+              <a:t>Gate the ASR stage on Whisper’s own language identification, and add speaker diarisation.</a:t>
+            </a:r>
+            <a:endParaRPr lang="en-US" sz="1500" dirty="0"/>
+          </a:p>
+        </p:txBody>
+      </p:sp>
+    </p:spTree>
+  </p:cSld>
+  <p:clrMapOvr>
+    <a:masterClrMapping/>
+  </p:clrMapOvr>
+</p:sld>
+</file>
+
+<file path=ppt/slides/slide17.xml><?xml version="1.0" encoding="utf-8"?>
+<p:sld xmlns:a="http://schemas.openxmlformats.org/drawingml/2006/main" xmlns:r="http://schemas.openxmlformats.org/officeDocument/2006/relationships" xmlns:p="http://schemas.openxmlformats.org/presentationml/2006/main">
+  <p:cSld name="Slide 17">
     <p:bg>
       <p:bgPr>
         <a:solidFill>
@@ -9289,7 +9629,7 @@
                 <a:ea typeface="Calibri" pitchFamily="34" charset="-122"/>
                 <a:cs typeface="Calibri" pitchFamily="34" charset="-120"/>
               </a:rPr>
-              <a:t>RQ2 · 626 CLIPS</a:t>
+              <a:t>EVALUATION</a:t>
             </a:r>
             <a:endParaRPr lang="en-US" sz="1200" dirty="0"/>
           </a:p>
@@ -9328,45 +9668,127 @@
                 <a:ea typeface="Cambria" pitchFamily="34" charset="-122"/>
                 <a:cs typeface="Cambria" pitchFamily="34" charset="-120"/>
               </a:rPr>
-              <a:t>Agreement ranks independence, not difficulty</a:t>
+              <a:t>Inference and scoring are separate notebooks</a:t>
             </a:r>
             <a:endParaRPr lang="en-US" sz="3200" dirty="0"/>
           </a:p>
         </p:txBody>
       </p:sp>
-      <p:pic>
-        <p:nvPicPr>
-          <p:cNvPr id="4" name="Image 0" descr="docs/figures/fig1_agreement_tiers.png">    </p:cNvPr>
-          <p:cNvPicPr>
-            <a:picLocks noChangeAspect="1"/>
-          </p:cNvPicPr>
-          <p:nvPr/>
-        </p:nvPicPr>
-        <p:blipFill>
-          <a:blip r:embed="rId1"/>
-          <a:srcRect l="0" r="0" t="0" b="0"/>
-          <a:stretch/>
-        </p:blipFill>
+      <p:sp>
+        <p:nvSpPr>
+          <p:cNvPr id="4" name="Shape 2"/>
+          <p:cNvSpPr/>
+          <p:nvPr/>
+        </p:nvSpPr>
         <p:spPr>
           <a:xfrm>
             <a:off x="685800" y="1783080"/>
-            <a:ext cx="6035040" cy="4023360"/>
-          </a:xfrm>
-          <a:prstGeom prst="rect">
-            <a:avLst/>
-          </a:prstGeom>
-        </p:spPr>
-      </p:pic>
-      <p:sp>
-        <p:nvSpPr>
-          <p:cNvPr id="5" name="Text 2"/>
-          <p:cNvSpPr txBox="1"/>
-          <p:nvPr/>
-        </p:nvSpPr>
-        <p:spPr>
-          <a:xfrm>
-            <a:off x="7086600" y="1965960"/>
-            <a:ext cx="4389120" cy="3657600"/>
+            <a:ext cx="5257800" cy="3794760"/>
+          </a:xfrm>
+          <a:prstGeom prst="roundRect">
+            <a:avLst>
+              <a:gd name="adj" fmla="val 2892"/>
+            </a:avLst>
+          </a:prstGeom>
+          <a:solidFill>
+            <a:srgbClr val="F4F6FA"/>
+          </a:solidFill>
+          <a:ln w="12700">
+            <a:solidFill>
+              <a:srgbClr val="F4F6FA"/>
+            </a:solidFill>
+            <a:prstDash val="solid"/>
+          </a:ln>
+        </p:spPr>
+      </p:sp>
+      <p:sp>
+        <p:nvSpPr>
+          <p:cNvPr id="5" name="Text 3"/>
+          <p:cNvSpPr txBox="1"/>
+          <p:nvPr/>
+        </p:nvSpPr>
+        <p:spPr>
+          <a:xfrm>
+            <a:off x="1005840" y="2011680"/>
+            <a:ext cx="4617720" cy="365760"/>
+          </a:xfrm>
+          <a:prstGeom prst="rect">
+            <a:avLst/>
+          </a:prstGeom>
+          <a:noFill/>
+          <a:ln/>
+        </p:spPr>
+        <p:txBody>
+          <a:bodyPr wrap="square" lIns="0" tIns="0" rIns="0" bIns="0" rtlCol="0" anchor="ctr"/>
+          <a:lstStyle/>
+          <a:p>
+            <a:pPr indent="0" marL="0">
+              <a:buNone/>
+            </a:pPr>
+            <a:r>
+              <a:rPr lang="en-US" sz="1500" b="1" dirty="0">
+                <a:solidFill>
+                  <a:srgbClr val="2A78D6"/>
+                </a:solidFill>
+                <a:latin typeface="Courier New" pitchFamily="34" charset="0"/>
+                <a:ea typeface="Courier New" pitchFamily="34" charset="-122"/>
+                <a:cs typeface="Courier New" pitchFamily="34" charset="-120"/>
+              </a:rPr>
+              <a:t>02_vlm_benchmark.ipynb</a:t>
+            </a:r>
+            <a:endParaRPr lang="en-US" sz="1500" dirty="0"/>
+          </a:p>
+        </p:txBody>
+      </p:sp>
+      <p:sp>
+        <p:nvSpPr>
+          <p:cNvPr id="6" name="Text 4"/>
+          <p:cNvSpPr txBox="1"/>
+          <p:nvPr/>
+        </p:nvSpPr>
+        <p:spPr>
+          <a:xfrm>
+            <a:off x="1005840" y="2395728"/>
+            <a:ext cx="4617720" cy="274320"/>
+          </a:xfrm>
+          <a:prstGeom prst="rect">
+            <a:avLst/>
+          </a:prstGeom>
+          <a:noFill/>
+          <a:ln/>
+        </p:spPr>
+        <p:txBody>
+          <a:bodyPr wrap="square" lIns="0" tIns="0" rIns="0" bIns="0" rtlCol="0" anchor="ctr"/>
+          <a:lstStyle/>
+          <a:p>
+            <a:pPr indent="0" marL="0">
+              <a:buNone/>
+            </a:pPr>
+            <a:r>
+              <a:rPr lang="en-US" sz="1150" spc="60" kern="0" dirty="0">
+                <a:solidFill>
+                  <a:srgbClr val="5A5954"/>
+                </a:solidFill>
+                <a:latin typeface="Calibri" pitchFamily="34" charset="0"/>
+                <a:ea typeface="Calibri" pitchFamily="34" charset="-122"/>
+                <a:cs typeface="Calibri" pitchFamily="34" charset="-120"/>
+              </a:rPr>
+              <a:t>GPU · Kelvin2 MIG slice</a:t>
+            </a:r>
+            <a:endParaRPr lang="en-US" sz="1150" dirty="0"/>
+          </a:p>
+        </p:txBody>
+      </p:sp>
+      <p:sp>
+        <p:nvSpPr>
+          <p:cNvPr id="7" name="Text 5"/>
+          <p:cNvSpPr txBox="1"/>
+          <p:nvPr/>
+        </p:nvSpPr>
+        <p:spPr>
+          <a:xfrm>
+            <a:off x="1005840" y="2788920"/>
+            <a:ext cx="4617720" cy="2651760"/>
           </a:xfrm>
           <a:prstGeom prst="rect">
             <a:avLst/>
@@ -9389,7 +9811,7 @@
               <a:buChar char="•"/>
             </a:pPr>
             <a:r>
-              <a:rPr lang="en-US" sz="1400" dirty="0">
+              <a:rPr lang="en-US" sz="1300" dirty="0">
                 <a:solidFill>
                   <a:srgbClr val="10100F"/>
                 </a:solidFill>
@@ -9397,9 +9819,9 @@
                 <a:ea typeface="Calibri" pitchFamily="34" charset="-122"/>
                 <a:cs typeface="Calibri" pitchFamily="34" charset="-120"/>
               </a:rPr>
-              <a:t>People count 0.812 — four unrelated families.</a:t>
-            </a:r>
-            <a:endParaRPr lang="en-US" sz="1400" dirty="0"/>
+              <a:t>Seven models over all 626 clips under one protocol: 4 frames, one prompt, greedy decoding.</a:t>
+            </a:r>
+            <a:endParaRPr lang="en-US" sz="1300" dirty="0"/>
           </a:p>
           <a:p>
             <a:pPr marL="342900" indent="-342900">
@@ -9413,7 +9835,7 @@
               <a:buChar char="•"/>
             </a:pPr>
             <a:r>
-              <a:rPr lang="en-US" sz="1400" dirty="0">
+              <a:rPr lang="en-US" sz="1300" dirty="0">
                 <a:solidFill>
                   <a:srgbClr val="10100F"/>
                 </a:solidFill>
@@ -9421,9 +9843,9 @@
                 <a:ea typeface="Calibri" pitchFamily="34" charset="-122"/>
                 <a:cs typeface="Calibri" pitchFamily="34" charset="-120"/>
               </a:rPr>
-              <a:t>Keywords 0.173 — three extractors, one transcript.</a:t>
-            </a:r>
-            <a:endParaRPr lang="en-US" sz="1400" dirty="0"/>
+              <a:t>Writes one prediction cache per model.</a:t>
+            </a:r>
+            <a:endParaRPr lang="en-US" sz="1300" dirty="0"/>
           </a:p>
           <a:p>
             <a:pPr marL="342900" indent="-342900">
@@ -9437,7 +9859,7 @@
               <a:buChar char="•"/>
             </a:pPr>
             <a:r>
-              <a:rPr lang="en-US" sz="1400" dirty="0">
+              <a:rPr lang="en-US" sz="1300" dirty="0">
                 <a:solidFill>
                   <a:srgbClr val="10100F"/>
                 </a:solidFill>
@@ -9445,9 +9867,9 @@
                 <a:ea typeface="Calibri" pitchFamily="34" charset="-122"/>
                 <a:cs typeface="Calibri" pitchFamily="34" charset="-120"/>
               </a:rPr>
-              <a:t>On-screen text conflicts on 53.4% of clips and reaches high agreement on none.</a:t>
-            </a:r>
-            <a:endParaRPr lang="en-US" sz="1400" dirty="0"/>
+              <a:t>Fully resumable — reloads the cache, retries only failures, skips completed work.</a:t>
+            </a:r>
+            <a:endParaRPr lang="en-US" sz="1300" dirty="0"/>
           </a:p>
           <a:p>
             <a:pPr marL="342900" indent="-342900">
@@ -9461,7 +9883,7 @@
               <a:buChar char="•"/>
             </a:pPr>
             <a:r>
-              <a:rPr lang="en-US" sz="1400" dirty="0">
+              <a:rPr lang="en-US" sz="1300" dirty="0">
                 <a:solidFill>
                   <a:srgbClr val="10100F"/>
                 </a:solidFill>
@@ -9469,9 +9891,271 @@
                 <a:ea typeface="Calibri" pitchFamily="34" charset="-122"/>
                 <a:cs typeface="Calibri" pitchFamily="34" charset="-120"/>
               </a:rPr>
-              <a:t>The ordering is the ordering of source independence.</a:t>
-            </a:r>
-            <a:endParaRPr lang="en-US" sz="1400" dirty="0"/>
+              <a:t>Each cache carries a prompt version; a stale cache is ignored, never silently mixed in.</a:t>
+            </a:r>
+            <a:endParaRPr lang="en-US" sz="1300" dirty="0"/>
+          </a:p>
+        </p:txBody>
+      </p:sp>
+      <p:sp>
+        <p:nvSpPr>
+          <p:cNvPr id="8" name="Shape 6"/>
+          <p:cNvSpPr/>
+          <p:nvPr/>
+        </p:nvSpPr>
+        <p:spPr>
+          <a:xfrm>
+            <a:off x="6217920" y="1783080"/>
+            <a:ext cx="5257800" cy="3794760"/>
+          </a:xfrm>
+          <a:prstGeom prst="roundRect">
+            <a:avLst>
+              <a:gd name="adj" fmla="val 2892"/>
+            </a:avLst>
+          </a:prstGeom>
+          <a:solidFill>
+            <a:srgbClr val="F4F6FA"/>
+          </a:solidFill>
+          <a:ln w="12700">
+            <a:solidFill>
+              <a:srgbClr val="F4F6FA"/>
+            </a:solidFill>
+            <a:prstDash val="solid"/>
+          </a:ln>
+        </p:spPr>
+      </p:sp>
+      <p:sp>
+        <p:nvSpPr>
+          <p:cNvPr id="9" name="Text 7"/>
+          <p:cNvSpPr txBox="1"/>
+          <p:nvPr/>
+        </p:nvSpPr>
+        <p:spPr>
+          <a:xfrm>
+            <a:off x="6537960" y="2011680"/>
+            <a:ext cx="4617720" cy="365760"/>
+          </a:xfrm>
+          <a:prstGeom prst="rect">
+            <a:avLst/>
+          </a:prstGeom>
+          <a:noFill/>
+          <a:ln/>
+        </p:spPr>
+        <p:txBody>
+          <a:bodyPr wrap="square" lIns="0" tIns="0" rIns="0" bIns="0" rtlCol="0" anchor="ctr"/>
+          <a:lstStyle/>
+          <a:p>
+            <a:pPr indent="0" marL="0">
+              <a:buNone/>
+            </a:pPr>
+            <a:r>
+              <a:rPr lang="en-US" sz="1500" b="1" dirty="0">
+                <a:solidFill>
+                  <a:srgbClr val="EB6834"/>
+                </a:solidFill>
+                <a:latin typeface="Courier New" pitchFamily="34" charset="0"/>
+                <a:ea typeface="Courier New" pitchFamily="34" charset="-122"/>
+                <a:cs typeface="Courier New" pitchFamily="34" charset="-120"/>
+              </a:rPr>
+              <a:t>03_vlm_benchmark.ipynb</a:t>
+            </a:r>
+            <a:endParaRPr lang="en-US" sz="1500" dirty="0"/>
+          </a:p>
+        </p:txBody>
+      </p:sp>
+      <p:sp>
+        <p:nvSpPr>
+          <p:cNvPr id="10" name="Text 8"/>
+          <p:cNvSpPr txBox="1"/>
+          <p:nvPr/>
+        </p:nvSpPr>
+        <p:spPr>
+          <a:xfrm>
+            <a:off x="6537960" y="2395728"/>
+            <a:ext cx="4617720" cy="274320"/>
+          </a:xfrm>
+          <a:prstGeom prst="rect">
+            <a:avLst/>
+          </a:prstGeom>
+          <a:noFill/>
+          <a:ln/>
+        </p:spPr>
+        <p:txBody>
+          <a:bodyPr wrap="square" lIns="0" tIns="0" rIns="0" bIns="0" rtlCol="0" anchor="ctr"/>
+          <a:lstStyle/>
+          <a:p>
+            <a:pPr indent="0" marL="0">
+              <a:buNone/>
+            </a:pPr>
+            <a:r>
+              <a:rPr lang="en-US" sz="1150" spc="60" kern="0" dirty="0">
+                <a:solidFill>
+                  <a:srgbClr val="5A5954"/>
+                </a:solidFill>
+                <a:latin typeface="Calibri" pitchFamily="34" charset="0"/>
+                <a:ea typeface="Calibri" pitchFamily="34" charset="-122"/>
+                <a:cs typeface="Calibri" pitchFamily="34" charset="-120"/>
+              </a:rPr>
+              <a:t>CPU · anywhere, no GPU</a:t>
+            </a:r>
+            <a:endParaRPr lang="en-US" sz="1150" dirty="0"/>
+          </a:p>
+        </p:txBody>
+      </p:sp>
+      <p:sp>
+        <p:nvSpPr>
+          <p:cNvPr id="11" name="Text 9"/>
+          <p:cNvSpPr txBox="1"/>
+          <p:nvPr/>
+        </p:nvSpPr>
+        <p:spPr>
+          <a:xfrm>
+            <a:off x="6537960" y="2788920"/>
+            <a:ext cx="4617720" cy="2651760"/>
+          </a:xfrm>
+          <a:prstGeom prst="rect">
+            <a:avLst/>
+          </a:prstGeom>
+          <a:noFill/>
+          <a:ln/>
+        </p:spPr>
+        <p:txBody>
+          <a:bodyPr wrap="square" rtlCol="0" anchor="ctr"/>
+          <a:lstStyle/>
+          <a:p>
+            <a:pPr marL="342900" indent="-342900">
+              <a:lnSpc>
+                <a:spcPts val="2100"/>
+              </a:lnSpc>
+              <a:spcAft>
+                <a:spcPts val="900"/>
+              </a:spcAft>
+              <a:buSzPct val="100000"/>
+              <a:buChar char="•"/>
+            </a:pPr>
+            <a:r>
+              <a:rPr lang="en-US" sz="1300" dirty="0">
+                <a:solidFill>
+                  <a:srgbClr val="10100F"/>
+                </a:solidFill>
+                <a:latin typeface="Calibri" pitchFamily="34" charset="0"/>
+                <a:ea typeface="Calibri" pitchFamily="34" charset="-122"/>
+                <a:cs typeface="Calibri" pitchFamily="34" charset="-120"/>
+              </a:rPr>
+              <a:t>Loads no models at all.</a:t>
+            </a:r>
+            <a:endParaRPr lang="en-US" sz="1300" dirty="0"/>
+          </a:p>
+          <a:p>
+            <a:pPr marL="342900" indent="-342900">
+              <a:lnSpc>
+                <a:spcPts val="2100"/>
+              </a:lnSpc>
+              <a:spcAft>
+                <a:spcPts val="900"/>
+              </a:spcAft>
+              <a:buSzPct val="100000"/>
+              <a:buChar char="•"/>
+            </a:pPr>
+            <a:r>
+              <a:rPr lang="en-US" sz="1300" dirty="0">
+                <a:solidFill>
+                  <a:srgbClr val="10100F"/>
+                </a:solidFill>
+                <a:latin typeface="Calibri" pitchFamily="34" charset="0"/>
+                <a:ea typeface="Calibri" pitchFamily="34" charset="-122"/>
+                <a:cs typeface="Calibri" pitchFamily="34" charset="-120"/>
+              </a:rPr>
+              <a:t>Reads the ground truth and the caches, and rebuilds every comparison table in seconds.</a:t>
+            </a:r>
+            <a:endParaRPr lang="en-US" sz="1300" dirty="0"/>
+          </a:p>
+          <a:p>
+            <a:pPr marL="342900" indent="-342900">
+              <a:lnSpc>
+                <a:spcPts val="2100"/>
+              </a:lnSpc>
+              <a:spcAft>
+                <a:spcPts val="900"/>
+              </a:spcAft>
+              <a:buSzPct val="100000"/>
+              <a:buChar char="•"/>
+            </a:pPr>
+            <a:r>
+              <a:rPr lang="en-US" sz="1300" dirty="0">
+                <a:solidFill>
+                  <a:srgbClr val="10100F"/>
+                </a:solidFill>
+                <a:latin typeface="Calibri" pitchFamily="34" charset="0"/>
+                <a:ea typeface="Calibri" pitchFamily="34" charset="-122"/>
+                <a:cs typeface="Calibri" pitchFamily="34" charset="-120"/>
+              </a:rPr>
+              <a:t>Coverage denominators are reported beside every mean.</a:t>
+            </a:r>
+            <a:endParaRPr lang="en-US" sz="1300" dirty="0"/>
+          </a:p>
+          <a:p>
+            <a:pPr marL="342900" indent="-342900">
+              <a:lnSpc>
+                <a:spcPts val="2100"/>
+              </a:lnSpc>
+              <a:spcAft>
+                <a:spcPts val="900"/>
+              </a:spcAft>
+              <a:buSzPct val="100000"/>
+              <a:buChar char="•"/>
+            </a:pPr>
+            <a:r>
+              <a:rPr lang="en-US" sz="1300" dirty="0">
+                <a:solidFill>
+                  <a:srgbClr val="10100F"/>
+                </a:solidFill>
+                <a:latin typeface="Calibri" pitchFamily="34" charset="0"/>
+                <a:ea typeface="Calibri" pitchFamily="34" charset="-122"/>
+                <a:cs typeface="Calibri" pitchFamily="34" charset="-120"/>
+              </a:rPr>
+              <a:t>Scoring can be corrected and re-run without paying for inference again.</a:t>
+            </a:r>
+            <a:endParaRPr lang="en-US" sz="1300" dirty="0"/>
+          </a:p>
+        </p:txBody>
+      </p:sp>
+      <p:sp>
+        <p:nvSpPr>
+          <p:cNvPr id="12" name="Text 10"/>
+          <p:cNvSpPr txBox="1"/>
+          <p:nvPr/>
+        </p:nvSpPr>
+        <p:spPr>
+          <a:xfrm>
+            <a:off x="685800" y="5760720"/>
+            <a:ext cx="10789920" cy="548640"/>
+          </a:xfrm>
+          <a:prstGeom prst="rect">
+            <a:avLst/>
+          </a:prstGeom>
+          <a:noFill/>
+          <a:ln/>
+        </p:spPr>
+        <p:txBody>
+          <a:bodyPr wrap="square" lIns="0" tIns="0" rIns="0" bIns="0" rtlCol="0" anchor="ctr"/>
+          <a:lstStyle/>
+          <a:p>
+            <a:pPr indent="0" marL="0">
+              <a:buNone/>
+            </a:pPr>
+            <a:r>
+              <a:rPr lang="en-US" sz="1350" i="1" dirty="0">
+                <a:solidFill>
+                  <a:srgbClr val="12305B"/>
+                </a:solidFill>
+                <a:latin typeface="Calibri" pitchFamily="34" charset="0"/>
+                <a:ea typeface="Calibri" pitchFamily="34" charset="-122"/>
+                <a:cs typeface="Calibri" pitchFamily="34" charset="-120"/>
+              </a:rPr>
+              <a:t>The split is the highest-value structural decision in the project: an interrupted GPU job costs nothing, and a scoring fix never re-runs inference.</a:t>
+            </a:r>
+            <a:endParaRPr lang="en-US" sz="1350" dirty="0"/>
           </a:p>
         </p:txBody>
       </p:sp>
